--- a/dist/초6/수학/원과자료/초6_수학_원과자료_04_알맞은그래프고르기_학생용.pptx
+++ b/dist/초6/수학/원과자료/초6_수학_원과자료_04_알맞은그래프고르기_학생용.pptx
@@ -118,44 +118,44 @@
   <p:extLst>
     <p:ext uri="{521415D9-36F7-43E2-AB2F-B90AF26B5E84}">
       <p14:sectionLst xmlns:p14="http://schemas.microsoft.com/office/powerpoint/2010/main">
-        <p14:section name="도입" id="{ad64b1cd-491e-8af0-1cbf-4bb74ec16d0e}">
+        <p14:section name="도입" id="{2b7f1e88-b46f-f1e5-5ffc-dff968f25539}">
           <p14:sldIdLst>
             <p14:sldId id="256"/>
             <p14:sldId id="257"/>
           </p14:sldIdLst>
         </p14:section>
-        <p14:section name="개념" id="{26c86180-6844-abfa-7761-acedd0715ce8}">
+        <p14:section name="개념" id="{e7243b6c-8842-ba22-a7f8-25d384ee5965}">
           <p14:sldIdLst>
             <p14:sldId id="258"/>
             <p14:sldId id="259"/>
             <p14:sldId id="262"/>
           </p14:sldIdLst>
         </p14:section>
-        <p14:section name="연습" id="{870b8005-718e-1353-2295-13cb717d0649}">
+        <p14:section name="연습" id="{f824e094-5385-17f5-3fc0-86a64895269b}">
           <p14:sldIdLst>
             <p14:sldId id="260"/>
             <p14:sldId id="261"/>
             <p14:sldId id="263"/>
           </p14:sldIdLst>
         </p14:section>
-        <p14:section name="개념" id="{decabb1b-db7d-eff4-ccfc-5605839fd28f}">
+        <p14:section name="개념" id="{365c9fad-3da9-f89c-8c46-884719bc4d81}">
           <p14:sldIdLst/>
         </p14:section>
-        <p14:section name="연습" id="{7bd79aa7-8a57-cc9d-355e-77a85ae9a899}">
+        <p14:section name="연습" id="{0692026d-37e3-917b-83d0-2e36163afcd6}">
           <p14:sldIdLst/>
         </p14:section>
-        <p14:section name="확인" id="{3ece90ea-58a0-2de0-281a-ae72a65cdb37}">
+        <p14:section name="확인" id="{eab592ed-0a2d-67ca-0d04-8d42efde5d24}">
           <p14:sldIdLst>
             <p14:sldId id="264"/>
             <p14:sldId id="265"/>
           </p14:sldIdLst>
         </p14:section>
-        <p14:section name="정리" id="{9f6ce006-5ff4-33e1-c81a-c37c6279196a}">
+        <p14:section name="정리" id="{ce306291-b761-881e-6e97-c6f7ee183ba4}">
           <p14:sldIdLst>
             <p14:sldId id="266"/>
           </p14:sldIdLst>
         </p14:section>
-        <p14:section name="보충" id="{a630d4bb-49f6-de79-75e0-01f4bf975565}">
+        <p14:section name="보충" id="{e27c022a-bad7-c561-2bd5-1eaed54a9abc}">
           <p14:sldIdLst>
             <p14:sldId id="267"/>
           </p14:sldIdLst>
@@ -2864,7 +2864,7 @@
       </p:sp>
       <p:sp>
         <p:nvSpPr>
-          <p:cNvPr id="3" name="S11-text342"/>
+          <p:cNvPr id="3" name="S11-text330"/>
           <p:cNvSpPr txBox="1"/>
           <p:nvPr/>
         </p:nvSpPr>
@@ -2903,7 +2903,7 @@
       </p:sp>
       <p:graphicFrame>
         <p:nvGraphicFramePr>
-          <p:cNvPr id="11" name="S11-table343"/>
+          <p:cNvPr id="11" name="S11-table331"/>
           <p:cNvGraphicFramePr>
             <a:graphicFrameLocks noGrp="1"/>
           </p:cNvGraphicFramePr>
@@ -3761,7 +3761,7 @@
       </p:graphicFrame>
       <p:sp>
         <p:nvSpPr>
-          <p:cNvPr id="5" name="S11-chip344"/>
+          <p:cNvPr id="5" name="S11-chip332"/>
           <p:cNvSpPr txBox="1"/>
           <p:nvPr/>
         </p:nvSpPr>
@@ -3808,7 +3808,7 @@
       </p:sp>
       <p:sp>
         <p:nvSpPr>
-          <p:cNvPr id="6" name="S11-text345"/>
+          <p:cNvPr id="6" name="S11-text333"/>
           <p:cNvSpPr txBox="1"/>
           <p:nvPr/>
         </p:nvSpPr>
@@ -3864,7 +3864,7 @@
       </p:sp>
       <p:sp>
         <p:nvSpPr>
-          <p:cNvPr id="7" name="S11-chip346"/>
+          <p:cNvPr id="7" name="S11-chip334"/>
           <p:cNvSpPr txBox="1"/>
           <p:nvPr/>
         </p:nvSpPr>
@@ -3911,7 +3911,7 @@
       </p:sp>
       <p:sp>
         <p:nvSpPr>
-          <p:cNvPr id="8" name="S11-text347"/>
+          <p:cNvPr id="8" name="S11-text335"/>
           <p:cNvSpPr txBox="1"/>
           <p:nvPr/>
         </p:nvSpPr>
@@ -3967,7 +3967,7 @@
       </p:sp>
       <p:sp>
         <p:nvSpPr>
-          <p:cNvPr id="9" name="S11-chip348"/>
+          <p:cNvPr id="9" name="S11-chip336"/>
           <p:cNvSpPr txBox="1"/>
           <p:nvPr/>
         </p:nvSpPr>
@@ -4014,7 +4014,7 @@
       </p:sp>
       <p:sp>
         <p:nvSpPr>
-          <p:cNvPr id="10" name="S11-text349"/>
+          <p:cNvPr id="10" name="S11-text337"/>
           <p:cNvSpPr txBox="1"/>
           <p:nvPr/>
         </p:nvSpPr>
@@ -4184,7 +4184,7 @@
       </p:sp>
       <p:sp>
         <p:nvSpPr>
-          <p:cNvPr id="3" name="S12-card350"/>
+          <p:cNvPr id="3" name="S12-card338"/>
           <p:cNvSpPr/>
           <p:nvPr/>
         </p:nvSpPr>
@@ -4211,7 +4211,7 @@
       </p:sp>
       <p:sp>
         <p:nvSpPr>
-          <p:cNvPr id="4" name="S12-cardtext351"/>
+          <p:cNvPr id="4" name="S12-cardtext339"/>
           <p:cNvSpPr txBox="1"/>
           <p:nvPr/>
         </p:nvSpPr>
@@ -4273,7 +4273,7 @@
       </p:sp>
       <p:sp>
         <p:nvSpPr>
-          <p:cNvPr id="5" name="S12-chip352"/>
+          <p:cNvPr id="5" name="S12-chip340"/>
           <p:cNvSpPr txBox="1"/>
           <p:nvPr/>
         </p:nvSpPr>
@@ -4320,7 +4320,7 @@
       </p:sp>
       <p:sp>
         <p:nvSpPr>
-          <p:cNvPr id="6" name="S12-chip353"/>
+          <p:cNvPr id="6" name="S12-chip341"/>
           <p:cNvSpPr txBox="1"/>
           <p:nvPr/>
         </p:nvSpPr>
@@ -4367,7 +4367,7 @@
       </p:sp>
       <p:sp>
         <p:nvSpPr>
-          <p:cNvPr id="7" name="S12-text354"/>
+          <p:cNvPr id="7" name="S12-text342"/>
           <p:cNvSpPr txBox="1"/>
           <p:nvPr/>
         </p:nvSpPr>
@@ -4406,7 +4406,7 @@
       </p:sp>
       <p:sp>
         <p:nvSpPr>
-          <p:cNvPr id="8" name="S12-text355"/>
+          <p:cNvPr id="8" name="S12-text343"/>
           <p:cNvSpPr txBox="1"/>
           <p:nvPr/>
         </p:nvSpPr>
@@ -4462,7 +4462,7 @@
       </p:sp>
       <p:sp>
         <p:nvSpPr>
-          <p:cNvPr id="9" name="S12-text356"/>
+          <p:cNvPr id="9" name="S12-text344"/>
           <p:cNvSpPr txBox="1"/>
           <p:nvPr/>
         </p:nvSpPr>
@@ -4518,7 +4518,7 @@
       </p:sp>
       <p:sp>
         <p:nvSpPr>
-          <p:cNvPr id="10" name="S12-text357"/>
+          <p:cNvPr id="10" name="S12-text345"/>
           <p:cNvSpPr txBox="1"/>
           <p:nvPr/>
         </p:nvSpPr>
@@ -4688,7 +4688,7 @@
       </p:sp>
       <p:sp>
         <p:nvSpPr>
-          <p:cNvPr id="3" name="S13-card358"/>
+          <p:cNvPr id="3" name="S13-card346"/>
           <p:cNvSpPr/>
           <p:nvPr/>
         </p:nvSpPr>
@@ -4715,7 +4715,7 @@
       </p:sp>
       <p:sp>
         <p:nvSpPr>
-          <p:cNvPr id="4" name="S13-cardtext359"/>
+          <p:cNvPr id="4" name="S13-cardtext347"/>
           <p:cNvSpPr txBox="1"/>
           <p:nvPr/>
         </p:nvSpPr>
@@ -4749,22 +4749,42 @@
                 <a:ea typeface="맑은 고딕" pitchFamily="34" charset="-122"/>
                 <a:cs typeface="맑은 고딕" pitchFamily="34" charset="-120"/>
               </a:rPr>
-              <a:t>막대그래프는 항목끼리 비교, 꺾은선그래프는 시간에 따른 변화를 보여 줘요.</a:t>
+              <a:t>막대그래프는 항목끼리 비교,</a:t>
             </a:r>
             <a:endParaRPr lang="ko-KR" sz="2800" dirty="0"/>
           </a:p>
-        </p:txBody>
-      </p:sp>
-      <p:sp>
-        <p:nvSpPr>
-          <p:cNvPr id="5" name="S13-figure360" descr="막대그래프: 축구 5명, 야구 3명, 농구 4명"/>
-          <p:cNvSpPr/>
-          <p:nvPr/>
-        </p:nvSpPr>
-        <p:spPr>
-          <a:xfrm>
-            <a:off x="2525182" y="2218773"/>
-            <a:ext cx="404536" cy="1685568"/>
+          <a:p>
+            <a:pPr eaLnBrk="0" indent="0" marL="0">
+              <a:spcAft>
+                <a:spcPts val="600"/>
+              </a:spcAft>
+              <a:buNone/>
+            </a:pPr>
+            <a:r>
+              <a:rPr lang="ko-KR" altLang="en-US" sz="2800" dirty="0">
+                <a:solidFill>
+                  <a:srgbClr val="1F2937"/>
+                </a:solidFill>
+                <a:latin typeface="맑은 고딕" pitchFamily="34" charset="0"/>
+                <a:ea typeface="맑은 고딕" pitchFamily="34" charset="-122"/>
+                <a:cs typeface="맑은 고딕" pitchFamily="34" charset="-120"/>
+              </a:rPr>
+              <a:t>꺾은선그래프는 시간에 따른 변화를 보여 줘요.</a:t>
+            </a:r>
+            <a:endParaRPr lang="ko-KR" sz="2800" dirty="0"/>
+          </a:p>
+        </p:txBody>
+      </p:sp>
+      <p:sp>
+        <p:nvSpPr>
+          <p:cNvPr id="5" name="S13-figure348" descr="막대그래프: 축구 5명, 야구 3명, 농구 4명"/>
+          <p:cNvSpPr/>
+          <p:nvPr/>
+        </p:nvSpPr>
+        <p:spPr>
+          <a:xfrm>
+            <a:off x="2146834" y="2351389"/>
+            <a:ext cx="565014" cy="1412534"/>
           </a:xfrm>
           <a:custGeom>
             <a:avLst/>
@@ -4773,15 +4793,15 @@
             <a:cxnLst/>
             <a:rect l="l" t="t" r="r" b="b"/>
             <a:pathLst>
-              <a:path w="404536" h="1685568">
+              <a:path w="565014" h="1412534">
                 <a:moveTo>
-                  <a:pt x="0" y="1685568"/>
+                  <a:pt x="0" y="1412534"/>
                 </a:moveTo>
                 <a:lnTo>
-                  <a:pt x="404536" y="1685568"/>
-                </a:lnTo>
-                <a:lnTo>
-                  <a:pt x="404536" y="0"/>
+                  <a:pt x="565014" y="1412534"/>
+                </a:lnTo>
+                <a:lnTo>
+                  <a:pt x="565014" y="0"/>
                 </a:lnTo>
                 <a:lnTo>
                   <a:pt x="0" y="0"/>
@@ -4803,14 +4823,14 @@
       </p:sp>
       <p:sp>
         <p:nvSpPr>
-          <p:cNvPr id="6" name="S13-mark361"/>
-          <p:cNvSpPr/>
-          <p:nvPr/>
-        </p:nvSpPr>
-        <p:spPr>
-          <a:xfrm>
-            <a:off x="3266832" y="2893000"/>
-            <a:ext cx="404536" cy="1011341"/>
+          <p:cNvPr id="6" name="S13-mark349"/>
+          <p:cNvSpPr/>
+          <p:nvPr/>
+        </p:nvSpPr>
+        <p:spPr>
+          <a:xfrm>
+            <a:off x="3276861" y="2916403"/>
+            <a:ext cx="565014" cy="847520"/>
           </a:xfrm>
           <a:custGeom>
             <a:avLst/>
@@ -4819,15 +4839,15 @@
             <a:cxnLst/>
             <a:rect l="l" t="t" r="r" b="b"/>
             <a:pathLst>
-              <a:path w="404536" h="1011341">
+              <a:path w="565014" h="847520">
                 <a:moveTo>
-                  <a:pt x="0" y="1011341"/>
+                  <a:pt x="0" y="847520"/>
                 </a:moveTo>
                 <a:lnTo>
-                  <a:pt x="404536" y="1011341"/>
-                </a:lnTo>
-                <a:lnTo>
-                  <a:pt x="404536" y="0"/>
+                  <a:pt x="565014" y="847520"/>
+                </a:lnTo>
+                <a:lnTo>
+                  <a:pt x="565014" y="0"/>
                 </a:lnTo>
                 <a:lnTo>
                   <a:pt x="0" y="0"/>
@@ -4849,14 +4869,14 @@
       </p:sp>
       <p:sp>
         <p:nvSpPr>
-          <p:cNvPr id="7" name="S13-mark362"/>
-          <p:cNvSpPr/>
-          <p:nvPr/>
-        </p:nvSpPr>
-        <p:spPr>
-          <a:xfrm>
-            <a:off x="4008481" y="2555886"/>
-            <a:ext cx="404536" cy="1348454"/>
+          <p:cNvPr id="7" name="S13-mark350"/>
+          <p:cNvSpPr/>
+          <p:nvPr/>
+        </p:nvSpPr>
+        <p:spPr>
+          <a:xfrm>
+            <a:off x="4406888" y="2633896"/>
+            <a:ext cx="565014" cy="1130027"/>
           </a:xfrm>
           <a:custGeom>
             <a:avLst/>
@@ -4865,15 +4885,15 @@
             <a:cxnLst/>
             <a:rect l="l" t="t" r="r" b="b"/>
             <a:pathLst>
-              <a:path w="404536" h="1348454">
+              <a:path w="565014" h="1130027">
                 <a:moveTo>
-                  <a:pt x="0" y="1348454"/>
+                  <a:pt x="0" y="1130027"/>
                 </a:moveTo>
                 <a:lnTo>
-                  <a:pt x="404536" y="1348454"/>
-                </a:lnTo>
-                <a:lnTo>
-                  <a:pt x="404536" y="0"/>
+                  <a:pt x="565014" y="1130027"/>
+                </a:lnTo>
+                <a:lnTo>
+                  <a:pt x="565014" y="0"/>
                 </a:lnTo>
                 <a:lnTo>
                   <a:pt x="0" y="0"/>
@@ -4895,14 +4915,14 @@
       </p:sp>
       <p:sp>
         <p:nvSpPr>
-          <p:cNvPr id="8" name="S13-mark363"/>
-          <p:cNvSpPr/>
-          <p:nvPr/>
-        </p:nvSpPr>
-        <p:spPr>
-          <a:xfrm>
-            <a:off x="2255491" y="3567227"/>
-            <a:ext cx="2427218" cy="0"/>
+          <p:cNvPr id="8" name="S13-mark351"/>
+          <p:cNvSpPr/>
+          <p:nvPr/>
+        </p:nvSpPr>
+        <p:spPr>
+          <a:xfrm>
+            <a:off x="1723074" y="3481416"/>
+            <a:ext cx="3672588" cy="0"/>
           </a:xfrm>
           <a:prstGeom prst="line">
             <a:avLst/>
@@ -4918,14 +4938,14 @@
       </p:sp>
       <p:sp>
         <p:nvSpPr>
-          <p:cNvPr id="9" name="S13-mark364"/>
-          <p:cNvSpPr/>
-          <p:nvPr/>
-        </p:nvSpPr>
-        <p:spPr>
-          <a:xfrm>
-            <a:off x="2255491" y="3230113"/>
-            <a:ext cx="2427218" cy="0"/>
+          <p:cNvPr id="9" name="S13-mark352"/>
+          <p:cNvSpPr/>
+          <p:nvPr/>
+        </p:nvSpPr>
+        <p:spPr>
+          <a:xfrm>
+            <a:off x="1723074" y="3198910"/>
+            <a:ext cx="3672588" cy="0"/>
           </a:xfrm>
           <a:prstGeom prst="line">
             <a:avLst/>
@@ -4941,14 +4961,14 @@
       </p:sp>
       <p:sp>
         <p:nvSpPr>
-          <p:cNvPr id="10" name="S13-mark365"/>
-          <p:cNvSpPr/>
-          <p:nvPr/>
-        </p:nvSpPr>
-        <p:spPr>
-          <a:xfrm>
-            <a:off x="2255491" y="2893000"/>
-            <a:ext cx="2427218" cy="0"/>
+          <p:cNvPr id="10" name="S13-mark353"/>
+          <p:cNvSpPr/>
+          <p:nvPr/>
+        </p:nvSpPr>
+        <p:spPr>
+          <a:xfrm>
+            <a:off x="1723074" y="2916403"/>
+            <a:ext cx="3672588" cy="0"/>
           </a:xfrm>
           <a:prstGeom prst="line">
             <a:avLst/>
@@ -4964,14 +4984,14 @@
       </p:sp>
       <p:sp>
         <p:nvSpPr>
-          <p:cNvPr id="11" name="S13-mark366"/>
-          <p:cNvSpPr/>
-          <p:nvPr/>
-        </p:nvSpPr>
-        <p:spPr>
-          <a:xfrm>
-            <a:off x="2255491" y="2555886"/>
-            <a:ext cx="2427218" cy="0"/>
+          <p:cNvPr id="11" name="S13-mark354"/>
+          <p:cNvSpPr/>
+          <p:nvPr/>
+        </p:nvSpPr>
+        <p:spPr>
+          <a:xfrm>
+            <a:off x="1723074" y="2633896"/>
+            <a:ext cx="3672588" cy="0"/>
           </a:xfrm>
           <a:prstGeom prst="line">
             <a:avLst/>
@@ -4987,14 +5007,14 @@
       </p:sp>
       <p:sp>
         <p:nvSpPr>
-          <p:cNvPr id="12" name="S13-mark367"/>
-          <p:cNvSpPr/>
-          <p:nvPr/>
-        </p:nvSpPr>
-        <p:spPr>
-          <a:xfrm>
-            <a:off x="2255491" y="2218773"/>
-            <a:ext cx="2427218" cy="0"/>
+          <p:cNvPr id="12" name="S13-mark355"/>
+          <p:cNvSpPr/>
+          <p:nvPr/>
+        </p:nvSpPr>
+        <p:spPr>
+          <a:xfrm>
+            <a:off x="1723074" y="2351389"/>
+            <a:ext cx="3672588" cy="0"/>
           </a:xfrm>
           <a:prstGeom prst="line">
             <a:avLst/>
@@ -5010,14 +5030,14 @@
       </p:sp>
       <p:sp>
         <p:nvSpPr>
-          <p:cNvPr id="13" name="S13-mark368"/>
-          <p:cNvSpPr/>
-          <p:nvPr/>
-        </p:nvSpPr>
-        <p:spPr>
-          <a:xfrm>
-            <a:off x="2255491" y="1881659"/>
-            <a:ext cx="2427218" cy="0"/>
+          <p:cNvPr id="13" name="S13-mark356"/>
+          <p:cNvSpPr/>
+          <p:nvPr/>
+        </p:nvSpPr>
+        <p:spPr>
+          <a:xfrm>
+            <a:off x="1723074" y="2068882"/>
+            <a:ext cx="3672588" cy="0"/>
           </a:xfrm>
           <a:prstGeom prst="line">
             <a:avLst/>
@@ -5033,14 +5053,14 @@
       </p:sp>
       <p:sp>
         <p:nvSpPr>
-          <p:cNvPr id="14" name="S13-mark369"/>
-          <p:cNvSpPr/>
-          <p:nvPr/>
-        </p:nvSpPr>
-        <p:spPr>
-          <a:xfrm>
-            <a:off x="2255491" y="3904341"/>
-            <a:ext cx="2427218" cy="0"/>
+          <p:cNvPr id="14" name="S13-mark357"/>
+          <p:cNvSpPr/>
+          <p:nvPr/>
+        </p:nvSpPr>
+        <p:spPr>
+          <a:xfrm>
+            <a:off x="1723074" y="3763923"/>
+            <a:ext cx="3672588" cy="0"/>
           </a:xfrm>
           <a:prstGeom prst="line">
             <a:avLst/>
@@ -5056,14 +5076,14 @@
       </p:sp>
       <p:sp>
         <p:nvSpPr>
-          <p:cNvPr id="15" name="S13-mark370"/>
+          <p:cNvPr id="15" name="S13-mark358"/>
           <p:cNvSpPr/>
           <p:nvPr/>
         </p:nvSpPr>
         <p:spPr>
           <a:xfrm flipV="1">
-            <a:off x="2255491" y="1746814"/>
-            <a:ext cx="0" cy="2157527"/>
+            <a:off x="1723074" y="1880545"/>
+            <a:ext cx="0" cy="1883379"/>
           </a:xfrm>
           <a:prstGeom prst="line">
             <a:avLst/>
@@ -5079,13 +5099,13 @@
       </p:sp>
       <p:sp>
         <p:nvSpPr>
-          <p:cNvPr id="16" name="S13-label372"/>
+          <p:cNvPr id="16" name="S13-label360"/>
           <p:cNvSpPr txBox="1"/>
           <p:nvPr/>
         </p:nvSpPr>
         <p:spPr>
           <a:xfrm>
-            <a:off x="1821878" y="3729716"/>
+            <a:off x="1175790" y="3589298"/>
             <a:ext cx="294132" cy="349250"/>
           </a:xfrm>
           <a:prstGeom prst="rect">
@@ -5118,13 +5138,13 @@
       </p:sp>
       <p:sp>
         <p:nvSpPr>
-          <p:cNvPr id="17" name="S13-label374"/>
+          <p:cNvPr id="17" name="S13-label362"/>
           <p:cNvSpPr txBox="1"/>
           <p:nvPr/>
         </p:nvSpPr>
         <p:spPr>
           <a:xfrm>
-            <a:off x="1821878" y="3392602"/>
+            <a:off x="1175790" y="3024285"/>
             <a:ext cx="294132" cy="349250"/>
           </a:xfrm>
           <a:prstGeom prst="rect">
@@ -5149,7 +5169,7 @@
                 <a:ea typeface="맑은 고딕" pitchFamily="34" charset="-122"/>
                 <a:cs typeface="맑은 고딕" pitchFamily="34" charset="-120"/>
               </a:rPr>
-              <a:t>1</a:t>
+              <a:t>2</a:t>
             </a:r>
             <a:endParaRPr lang="ko-KR" sz="2200" dirty="0"/>
           </a:p>
@@ -5157,13 +5177,13 @@
       </p:sp>
       <p:sp>
         <p:nvSpPr>
-          <p:cNvPr id="18" name="S13-label376"/>
+          <p:cNvPr id="18" name="S13-label364"/>
           <p:cNvSpPr txBox="1"/>
           <p:nvPr/>
         </p:nvSpPr>
         <p:spPr>
           <a:xfrm>
-            <a:off x="1821878" y="3055488"/>
+            <a:off x="1175790" y="2459271"/>
             <a:ext cx="294132" cy="349250"/>
           </a:xfrm>
           <a:prstGeom prst="rect">
@@ -5188,7 +5208,7 @@
                 <a:ea typeface="맑은 고딕" pitchFamily="34" charset="-122"/>
                 <a:cs typeface="맑은 고딕" pitchFamily="34" charset="-120"/>
               </a:rPr>
-              <a:t>2</a:t>
+              <a:t>4</a:t>
             </a:r>
             <a:endParaRPr lang="ko-KR" sz="2200" dirty="0"/>
           </a:p>
@@ -5196,13 +5216,13 @@
       </p:sp>
       <p:sp>
         <p:nvSpPr>
-          <p:cNvPr id="19" name="S13-label378"/>
+          <p:cNvPr id="19" name="S13-label366"/>
           <p:cNvSpPr txBox="1"/>
           <p:nvPr/>
         </p:nvSpPr>
         <p:spPr>
           <a:xfrm>
-            <a:off x="1821878" y="2718375"/>
+            <a:off x="1175790" y="1894257"/>
             <a:ext cx="294132" cy="349250"/>
           </a:xfrm>
           <a:prstGeom prst="rect">
@@ -5227,7 +5247,7 @@
                 <a:ea typeface="맑은 고딕" pitchFamily="34" charset="-122"/>
                 <a:cs typeface="맑은 고딕" pitchFamily="34" charset="-120"/>
               </a:rPr>
-              <a:t>3</a:t>
+              <a:t>6</a:t>
             </a:r>
             <a:endParaRPr lang="ko-KR" sz="2200" dirty="0"/>
           </a:p>
@@ -5235,14 +5255,14 @@
       </p:sp>
       <p:sp>
         <p:nvSpPr>
-          <p:cNvPr id="20" name="S13-label380"/>
+          <p:cNvPr id="20" name="S13-label368"/>
           <p:cNvSpPr txBox="1"/>
           <p:nvPr/>
         </p:nvSpPr>
         <p:spPr>
           <a:xfrm>
-            <a:off x="1821878" y="2381261"/>
-            <a:ext cx="294132" cy="349250"/>
+            <a:off x="963446" y="1423413"/>
+            <a:ext cx="718820" cy="349250"/>
           </a:xfrm>
           <a:prstGeom prst="rect">
             <a:avLst/>
@@ -5266,7 +5286,7 @@
                 <a:ea typeface="맑은 고딕" pitchFamily="34" charset="-122"/>
                 <a:cs typeface="맑은 고딕" pitchFamily="34" charset="-120"/>
               </a:rPr>
-              <a:t>4</a:t>
+              <a:t>(명)</a:t>
             </a:r>
             <a:endParaRPr lang="ko-KR" sz="2200" dirty="0"/>
           </a:p>
@@ -5274,14 +5294,14 @@
       </p:sp>
       <p:sp>
         <p:nvSpPr>
-          <p:cNvPr id="21" name="S13-label382"/>
+          <p:cNvPr id="21" name="S13-label370"/>
           <p:cNvSpPr txBox="1"/>
           <p:nvPr/>
         </p:nvSpPr>
         <p:spPr>
           <a:xfrm>
-            <a:off x="1821878" y="2044148"/>
-            <a:ext cx="294132" cy="349250"/>
+            <a:off x="2100665" y="3895347"/>
+            <a:ext cx="657352" cy="349250"/>
           </a:xfrm>
           <a:prstGeom prst="rect">
             <a:avLst/>
@@ -5305,7 +5325,7 @@
                 <a:ea typeface="맑은 고딕" pitchFamily="34" charset="-122"/>
                 <a:cs typeface="맑은 고딕" pitchFamily="34" charset="-120"/>
               </a:rPr>
-              <a:t>5</a:t>
+              <a:t>축구</a:t>
             </a:r>
             <a:endParaRPr lang="ko-KR" sz="2200" dirty="0"/>
           </a:p>
@@ -5313,14 +5333,14 @@
       </p:sp>
       <p:sp>
         <p:nvSpPr>
-          <p:cNvPr id="22" name="S13-label384"/>
+          <p:cNvPr id="22" name="S13-label372"/>
           <p:cNvSpPr txBox="1"/>
           <p:nvPr/>
         </p:nvSpPr>
         <p:spPr>
           <a:xfrm>
-            <a:off x="1821878" y="1707034"/>
-            <a:ext cx="294132" cy="349250"/>
+            <a:off x="3230692" y="3895347"/>
+            <a:ext cx="657352" cy="349250"/>
           </a:xfrm>
           <a:prstGeom prst="rect">
             <a:avLst/>
@@ -5344,7 +5364,7 @@
                 <a:ea typeface="맑은 고딕" pitchFamily="34" charset="-122"/>
                 <a:cs typeface="맑은 고딕" pitchFamily="34" charset="-120"/>
               </a:rPr>
-              <a:t>6</a:t>
+              <a:t>야구</a:t>
             </a:r>
             <a:endParaRPr lang="ko-KR" sz="2200" dirty="0"/>
           </a:p>
@@ -5352,14 +5372,14 @@
       </p:sp>
       <p:sp>
         <p:nvSpPr>
-          <p:cNvPr id="23" name="S13-label386"/>
+          <p:cNvPr id="23" name="S13-label374"/>
           <p:cNvSpPr txBox="1"/>
           <p:nvPr/>
         </p:nvSpPr>
         <p:spPr>
           <a:xfrm>
-            <a:off x="1609534" y="1369920"/>
-            <a:ext cx="718820" cy="349250"/>
+            <a:off x="4360719" y="3895347"/>
+            <a:ext cx="657352" cy="349250"/>
           </a:xfrm>
           <a:prstGeom prst="rect">
             <a:avLst/>
@@ -5383,7 +5403,7 @@
                 <a:ea typeface="맑은 고딕" pitchFamily="34" charset="-122"/>
                 <a:cs typeface="맑은 고딕" pitchFamily="34" charset="-120"/>
               </a:rPr>
-              <a:t>(명)</a:t>
+              <a:t>농구</a:t>
             </a:r>
             <a:endParaRPr lang="ko-KR" sz="2200" dirty="0"/>
           </a:p>
@@ -5391,124 +5411,7 @@
       </p:sp>
       <p:sp>
         <p:nvSpPr>
-          <p:cNvPr id="24" name="S13-label388"/>
-          <p:cNvSpPr txBox="1"/>
-          <p:nvPr/>
-        </p:nvSpPr>
-        <p:spPr>
-          <a:xfrm>
-            <a:off x="2398774" y="3948840"/>
-            <a:ext cx="657352" cy="349250"/>
-          </a:xfrm>
-          <a:prstGeom prst="rect">
-            <a:avLst/>
-          </a:prstGeom>
-          <a:noFill/>
-          <a:ln/>
-        </p:spPr>
-        <p:txBody>
-          <a:bodyPr wrap="square" lIns="0" tIns="0" rIns="0" bIns="0" rtlCol="0" anchor="ctr"/>
-          <a:lstStyle/>
-          <a:p>
-            <a:pPr eaLnBrk="0" algn="ctr" indent="0" marL="0">
-              <a:buNone/>
-            </a:pPr>
-            <a:r>
-              <a:rPr lang="ko-KR" altLang="en-US" sz="2200" dirty="0">
-                <a:solidFill>
-                  <a:srgbClr val="1F2937"/>
-                </a:solidFill>
-                <a:latin typeface="맑은 고딕" pitchFamily="34" charset="0"/>
-                <a:ea typeface="맑은 고딕" pitchFamily="34" charset="-122"/>
-                <a:cs typeface="맑은 고딕" pitchFamily="34" charset="-120"/>
-              </a:rPr>
-              <a:t>축구</a:t>
-            </a:r>
-            <a:endParaRPr lang="ko-KR" sz="2200" dirty="0"/>
-          </a:p>
-        </p:txBody>
-      </p:sp>
-      <p:sp>
-        <p:nvSpPr>
-          <p:cNvPr id="25" name="S13-label390"/>
-          <p:cNvSpPr txBox="1"/>
-          <p:nvPr/>
-        </p:nvSpPr>
-        <p:spPr>
-          <a:xfrm>
-            <a:off x="3140424" y="3948840"/>
-            <a:ext cx="657352" cy="349250"/>
-          </a:xfrm>
-          <a:prstGeom prst="rect">
-            <a:avLst/>
-          </a:prstGeom>
-          <a:noFill/>
-          <a:ln/>
-        </p:spPr>
-        <p:txBody>
-          <a:bodyPr wrap="square" lIns="0" tIns="0" rIns="0" bIns="0" rtlCol="0" anchor="ctr"/>
-          <a:lstStyle/>
-          <a:p>
-            <a:pPr eaLnBrk="0" algn="ctr" indent="0" marL="0">
-              <a:buNone/>
-            </a:pPr>
-            <a:r>
-              <a:rPr lang="ko-KR" altLang="en-US" sz="2200" dirty="0">
-                <a:solidFill>
-                  <a:srgbClr val="1F2937"/>
-                </a:solidFill>
-                <a:latin typeface="맑은 고딕" pitchFamily="34" charset="0"/>
-                <a:ea typeface="맑은 고딕" pitchFamily="34" charset="-122"/>
-                <a:cs typeface="맑은 고딕" pitchFamily="34" charset="-120"/>
-              </a:rPr>
-              <a:t>야구</a:t>
-            </a:r>
-            <a:endParaRPr lang="ko-KR" sz="2200" dirty="0"/>
-          </a:p>
-        </p:txBody>
-      </p:sp>
-      <p:sp>
-        <p:nvSpPr>
-          <p:cNvPr id="26" name="S13-label392"/>
-          <p:cNvSpPr txBox="1"/>
-          <p:nvPr/>
-        </p:nvSpPr>
-        <p:spPr>
-          <a:xfrm>
-            <a:off x="3882074" y="3948840"/>
-            <a:ext cx="657352" cy="349250"/>
-          </a:xfrm>
-          <a:prstGeom prst="rect">
-            <a:avLst/>
-          </a:prstGeom>
-          <a:noFill/>
-          <a:ln/>
-        </p:spPr>
-        <p:txBody>
-          <a:bodyPr wrap="square" lIns="0" tIns="0" rIns="0" bIns="0" rtlCol="0" anchor="ctr"/>
-          <a:lstStyle/>
-          <a:p>
-            <a:pPr eaLnBrk="0" algn="ctr" indent="0" marL="0">
-              <a:buNone/>
-            </a:pPr>
-            <a:r>
-              <a:rPr lang="ko-KR" altLang="en-US" sz="2200" dirty="0">
-                <a:solidFill>
-                  <a:srgbClr val="1F2937"/>
-                </a:solidFill>
-                <a:latin typeface="맑은 고딕" pitchFamily="34" charset="0"/>
-                <a:ea typeface="맑은 고딕" pitchFamily="34" charset="-122"/>
-                <a:cs typeface="맑은 고딕" pitchFamily="34" charset="-120"/>
-              </a:rPr>
-              <a:t>농구</a:t>
-            </a:r>
-            <a:endParaRPr lang="ko-KR" sz="2200" dirty="0"/>
-          </a:p>
-        </p:txBody>
-      </p:sp>
-      <p:sp>
-        <p:nvSpPr>
-          <p:cNvPr id="27" name="S13-label393"/>
+          <p:cNvPr id="24" name="S13-label375"/>
           <p:cNvSpPr txBox="1"/>
           <p:nvPr/>
         </p:nvSpPr>
@@ -5547,14 +5450,14 @@
       </p:sp>
       <p:sp>
         <p:nvSpPr>
-          <p:cNvPr id="28" name="S13-figure394" descr="꺾은선그래프: 1주 2 cm, 2주 3 cm, 3주 5 cm, 4주 6 cm"/>
-          <p:cNvSpPr/>
-          <p:nvPr/>
-        </p:nvSpPr>
-        <p:spPr>
-          <a:xfrm>
-            <a:off x="8062481" y="1881659"/>
-            <a:ext cx="2224950" cy="1348454"/>
+          <p:cNvPr id="25" name="S13-figure376" descr="꺾은선그래프: 1주 2 cm, 2주 3 cm, 3주 5 cm, 4주 6 cm"/>
+          <p:cNvSpPr/>
+          <p:nvPr/>
+        </p:nvSpPr>
+        <p:spPr>
+          <a:xfrm>
+            <a:off x="7648411" y="2112342"/>
+            <a:ext cx="3197521" cy="1065840"/>
           </a:xfrm>
           <a:custGeom>
             <a:avLst/>
@@ -5563,18 +5466,18 @@
             <a:cxnLst/>
             <a:rect l="l" t="t" r="r" b="b"/>
             <a:pathLst>
-              <a:path w="2224950" h="1348454">
+              <a:path w="3197521" h="1065840">
                 <a:moveTo>
-                  <a:pt x="0" y="1348454"/>
+                  <a:pt x="0" y="1065840"/>
                 </a:moveTo>
                 <a:lnTo>
-                  <a:pt x="741650" y="1011341"/>
-                </a:lnTo>
-                <a:lnTo>
-                  <a:pt x="1483300" y="337114"/>
-                </a:lnTo>
-                <a:lnTo>
-                  <a:pt x="2224950" y="0"/>
+                  <a:pt x="1065840" y="799380"/>
+                </a:lnTo>
+                <a:lnTo>
+                  <a:pt x="2131680" y="266460"/>
+                </a:lnTo>
+                <a:lnTo>
+                  <a:pt x="3197521" y="0"/>
                 </a:lnTo>
               </a:path>
             </a:pathLst>
@@ -5590,14 +5493,14 @@
       </p:sp>
       <p:sp>
         <p:nvSpPr>
-          <p:cNvPr id="29" name="S13-mark395"/>
+          <p:cNvPr id="26" name="S13-mark377"/>
           <p:cNvSpPr/>
           <p:nvPr/>
         </p:nvSpPr>
         <p:spPr>
           <a:xfrm flipV="1">
-            <a:off x="8062481" y="1881659"/>
-            <a:ext cx="0" cy="2022682"/>
+            <a:off x="7648411" y="2112342"/>
+            <a:ext cx="0" cy="1598760"/>
           </a:xfrm>
           <a:prstGeom prst="line">
             <a:avLst/>
@@ -5613,14 +5516,14 @@
       </p:sp>
       <p:sp>
         <p:nvSpPr>
-          <p:cNvPr id="30" name="S13-mark396"/>
+          <p:cNvPr id="27" name="S13-mark378"/>
           <p:cNvSpPr/>
           <p:nvPr/>
         </p:nvSpPr>
         <p:spPr>
           <a:xfrm flipV="1">
-            <a:off x="8804131" y="1881659"/>
-            <a:ext cx="0" cy="2022682"/>
+            <a:off x="8714251" y="2112342"/>
+            <a:ext cx="0" cy="1598760"/>
           </a:xfrm>
           <a:prstGeom prst="line">
             <a:avLst/>
@@ -5636,14 +5539,14 @@
       </p:sp>
       <p:sp>
         <p:nvSpPr>
-          <p:cNvPr id="31" name="S13-mark397"/>
+          <p:cNvPr id="28" name="S13-mark379"/>
           <p:cNvSpPr/>
           <p:nvPr/>
         </p:nvSpPr>
         <p:spPr>
           <a:xfrm flipV="1">
-            <a:off x="9545781" y="1881659"/>
-            <a:ext cx="0" cy="2022682"/>
+            <a:off x="9780092" y="2112342"/>
+            <a:ext cx="0" cy="1598760"/>
           </a:xfrm>
           <a:prstGeom prst="line">
             <a:avLst/>
@@ -5659,14 +5562,14 @@
       </p:sp>
       <p:sp>
         <p:nvSpPr>
-          <p:cNvPr id="32" name="S13-mark398"/>
+          <p:cNvPr id="29" name="S13-mark380"/>
           <p:cNvSpPr/>
           <p:nvPr/>
         </p:nvSpPr>
         <p:spPr>
           <a:xfrm flipV="1">
-            <a:off x="10287431" y="1881659"/>
-            <a:ext cx="0" cy="2022682"/>
+            <a:off x="10845932" y="2112342"/>
+            <a:ext cx="0" cy="1598760"/>
           </a:xfrm>
           <a:prstGeom prst="line">
             <a:avLst/>
@@ -5682,14 +5585,14 @@
       </p:sp>
       <p:sp>
         <p:nvSpPr>
-          <p:cNvPr id="33" name="S13-mark399"/>
-          <p:cNvSpPr/>
-          <p:nvPr/>
-        </p:nvSpPr>
-        <p:spPr>
-          <a:xfrm>
-            <a:off x="7590522" y="3567227"/>
-            <a:ext cx="3168868" cy="0"/>
+          <p:cNvPr id="30" name="S13-mark381"/>
+          <p:cNvSpPr/>
+          <p:nvPr/>
+        </p:nvSpPr>
+        <p:spPr>
+          <a:xfrm>
+            <a:off x="6982261" y="3444643"/>
+            <a:ext cx="4529821" cy="0"/>
           </a:xfrm>
           <a:prstGeom prst="line">
             <a:avLst/>
@@ -5705,14 +5608,14 @@
       </p:sp>
       <p:sp>
         <p:nvSpPr>
-          <p:cNvPr id="34" name="S13-mark400"/>
-          <p:cNvSpPr/>
-          <p:nvPr/>
-        </p:nvSpPr>
-        <p:spPr>
-          <a:xfrm>
-            <a:off x="7590522" y="3230113"/>
-            <a:ext cx="3168868" cy="0"/>
+          <p:cNvPr id="31" name="S13-mark382"/>
+          <p:cNvSpPr/>
+          <p:nvPr/>
+        </p:nvSpPr>
+        <p:spPr>
+          <a:xfrm>
+            <a:off x="6982261" y="3178183"/>
+            <a:ext cx="4529821" cy="0"/>
           </a:xfrm>
           <a:prstGeom prst="line">
             <a:avLst/>
@@ -5728,14 +5631,14 @@
       </p:sp>
       <p:sp>
         <p:nvSpPr>
-          <p:cNvPr id="35" name="S13-mark401"/>
-          <p:cNvSpPr/>
-          <p:nvPr/>
-        </p:nvSpPr>
-        <p:spPr>
-          <a:xfrm>
-            <a:off x="7590522" y="2893000"/>
-            <a:ext cx="3168868" cy="0"/>
+          <p:cNvPr id="32" name="S13-mark383"/>
+          <p:cNvSpPr/>
+          <p:nvPr/>
+        </p:nvSpPr>
+        <p:spPr>
+          <a:xfrm>
+            <a:off x="6982261" y="2911723"/>
+            <a:ext cx="4529821" cy="0"/>
           </a:xfrm>
           <a:prstGeom prst="line">
             <a:avLst/>
@@ -5751,14 +5654,14 @@
       </p:sp>
       <p:sp>
         <p:nvSpPr>
-          <p:cNvPr id="36" name="S13-mark402"/>
-          <p:cNvSpPr/>
-          <p:nvPr/>
-        </p:nvSpPr>
-        <p:spPr>
-          <a:xfrm>
-            <a:off x="7590522" y="2555886"/>
-            <a:ext cx="3168868" cy="0"/>
+          <p:cNvPr id="33" name="S13-mark384"/>
+          <p:cNvSpPr/>
+          <p:nvPr/>
+        </p:nvSpPr>
+        <p:spPr>
+          <a:xfrm>
+            <a:off x="6982261" y="2645262"/>
+            <a:ext cx="4529821" cy="0"/>
           </a:xfrm>
           <a:prstGeom prst="line">
             <a:avLst/>
@@ -5774,14 +5677,14 @@
       </p:sp>
       <p:sp>
         <p:nvSpPr>
-          <p:cNvPr id="37" name="S13-mark403"/>
-          <p:cNvSpPr/>
-          <p:nvPr/>
-        </p:nvSpPr>
-        <p:spPr>
-          <a:xfrm>
-            <a:off x="7590522" y="2218773"/>
-            <a:ext cx="3168868" cy="0"/>
+          <p:cNvPr id="34" name="S13-mark385"/>
+          <p:cNvSpPr/>
+          <p:nvPr/>
+        </p:nvSpPr>
+        <p:spPr>
+          <a:xfrm>
+            <a:off x="6982261" y="2378802"/>
+            <a:ext cx="4529821" cy="0"/>
           </a:xfrm>
           <a:prstGeom prst="line">
             <a:avLst/>
@@ -5797,14 +5700,14 @@
       </p:sp>
       <p:sp>
         <p:nvSpPr>
-          <p:cNvPr id="38" name="S13-mark404"/>
-          <p:cNvSpPr/>
-          <p:nvPr/>
-        </p:nvSpPr>
-        <p:spPr>
-          <a:xfrm>
-            <a:off x="7590522" y="1881659"/>
-            <a:ext cx="3168868" cy="0"/>
+          <p:cNvPr id="35" name="S13-mark386"/>
+          <p:cNvSpPr/>
+          <p:nvPr/>
+        </p:nvSpPr>
+        <p:spPr>
+          <a:xfrm>
+            <a:off x="6982261" y="2112342"/>
+            <a:ext cx="4529821" cy="0"/>
           </a:xfrm>
           <a:prstGeom prst="line">
             <a:avLst/>
@@ -5820,14 +5723,14 @@
       </p:sp>
       <p:sp>
         <p:nvSpPr>
-          <p:cNvPr id="39" name="S13-mark405"/>
-          <p:cNvSpPr/>
-          <p:nvPr/>
-        </p:nvSpPr>
-        <p:spPr>
-          <a:xfrm>
-            <a:off x="7590522" y="3904341"/>
-            <a:ext cx="3168868" cy="0"/>
+          <p:cNvPr id="36" name="S13-mark387"/>
+          <p:cNvSpPr/>
+          <p:nvPr/>
+        </p:nvSpPr>
+        <p:spPr>
+          <a:xfrm>
+            <a:off x="6982261" y="3711103"/>
+            <a:ext cx="4529821" cy="0"/>
           </a:xfrm>
           <a:prstGeom prst="line">
             <a:avLst/>
@@ -5843,14 +5746,14 @@
       </p:sp>
       <p:sp>
         <p:nvSpPr>
-          <p:cNvPr id="40" name="S13-mark406"/>
+          <p:cNvPr id="37" name="S13-mark388"/>
           <p:cNvSpPr/>
           <p:nvPr/>
         </p:nvSpPr>
         <p:spPr>
           <a:xfrm flipV="1">
-            <a:off x="7590522" y="1746814"/>
-            <a:ext cx="0" cy="2157527"/>
+            <a:off x="6982261" y="1934702"/>
+            <a:ext cx="0" cy="1776400"/>
           </a:xfrm>
           <a:prstGeom prst="line">
             <a:avLst/>
@@ -5866,13 +5769,13 @@
       </p:sp>
       <p:sp>
         <p:nvSpPr>
-          <p:cNvPr id="41" name="S13-mark407"/>
-          <p:cNvSpPr/>
-          <p:nvPr/>
-        </p:nvSpPr>
-        <p:spPr>
-          <a:xfrm>
-            <a:off x="8003045" y="3170677"/>
+          <p:cNvPr id="38" name="S13-mark389"/>
+          <p:cNvSpPr/>
+          <p:nvPr/>
+        </p:nvSpPr>
+        <p:spPr>
+          <a:xfrm>
+            <a:off x="7588975" y="3118747"/>
             <a:ext cx="118872" cy="118872"/>
           </a:xfrm>
           <a:prstGeom prst="ellipse">
@@ -5891,13 +5794,13 @@
       </p:sp>
       <p:sp>
         <p:nvSpPr>
-          <p:cNvPr id="42" name="S13-mark408"/>
-          <p:cNvSpPr/>
-          <p:nvPr/>
-        </p:nvSpPr>
-        <p:spPr>
-          <a:xfrm>
-            <a:off x="8744695" y="2833564"/>
+          <p:cNvPr id="39" name="S13-mark390"/>
+          <p:cNvSpPr/>
+          <p:nvPr/>
+        </p:nvSpPr>
+        <p:spPr>
+          <a:xfrm>
+            <a:off x="8654815" y="2852287"/>
             <a:ext cx="118872" cy="118872"/>
           </a:xfrm>
           <a:prstGeom prst="ellipse">
@@ -5916,13 +5819,13 @@
       </p:sp>
       <p:sp>
         <p:nvSpPr>
-          <p:cNvPr id="43" name="S13-mark409"/>
-          <p:cNvSpPr/>
-          <p:nvPr/>
-        </p:nvSpPr>
-        <p:spPr>
-          <a:xfrm>
-            <a:off x="9486345" y="2159337"/>
+          <p:cNvPr id="40" name="S13-mark391"/>
+          <p:cNvSpPr/>
+          <p:nvPr/>
+        </p:nvSpPr>
+        <p:spPr>
+          <a:xfrm>
+            <a:off x="9720656" y="2319366"/>
             <a:ext cx="118872" cy="118872"/>
           </a:xfrm>
           <a:prstGeom prst="ellipse">
@@ -5941,13 +5844,13 @@
       </p:sp>
       <p:sp>
         <p:nvSpPr>
-          <p:cNvPr id="44" name="S13-mark410"/>
-          <p:cNvSpPr/>
-          <p:nvPr/>
-        </p:nvSpPr>
-        <p:spPr>
-          <a:xfrm>
-            <a:off x="10227995" y="1822223"/>
+          <p:cNvPr id="41" name="S13-mark392"/>
+          <p:cNvSpPr/>
+          <p:nvPr/>
+        </p:nvSpPr>
+        <p:spPr>
+          <a:xfrm>
+            <a:off x="10786496" y="2052906"/>
             <a:ext cx="118872" cy="118872"/>
           </a:xfrm>
           <a:prstGeom prst="ellipse">
@@ -5966,13 +5869,13 @@
       </p:sp>
       <p:sp>
         <p:nvSpPr>
-          <p:cNvPr id="45" name="S13-label412"/>
+          <p:cNvPr id="42" name="S13-label394"/>
           <p:cNvSpPr txBox="1"/>
           <p:nvPr/>
         </p:nvSpPr>
         <p:spPr>
           <a:xfrm>
-            <a:off x="7156909" y="3729716"/>
+            <a:off x="6457710" y="3536478"/>
             <a:ext cx="294132" cy="349250"/>
           </a:xfrm>
           <a:prstGeom prst="rect">
@@ -6005,13 +5908,13 @@
       </p:sp>
       <p:sp>
         <p:nvSpPr>
-          <p:cNvPr id="46" name="S13-label414"/>
+          <p:cNvPr id="43" name="S13-label396"/>
           <p:cNvSpPr txBox="1"/>
           <p:nvPr/>
         </p:nvSpPr>
         <p:spPr>
           <a:xfrm>
-            <a:off x="7156909" y="3729716"/>
+            <a:off x="6457710" y="3003558"/>
             <a:ext cx="294132" cy="349250"/>
           </a:xfrm>
           <a:prstGeom prst="rect">
@@ -6036,7 +5939,7 @@
                 <a:ea typeface="맑은 고딕" pitchFamily="34" charset="-122"/>
                 <a:cs typeface="맑은 고딕" pitchFamily="34" charset="-120"/>
               </a:rPr>
-              <a:t>0</a:t>
+              <a:t>2</a:t>
             </a:r>
             <a:endParaRPr lang="ko-KR" sz="2200" dirty="0"/>
           </a:p>
@@ -6044,13 +5947,13 @@
       </p:sp>
       <p:sp>
         <p:nvSpPr>
-          <p:cNvPr id="47" name="S13-label416"/>
+          <p:cNvPr id="44" name="S13-label398"/>
           <p:cNvSpPr txBox="1"/>
           <p:nvPr/>
         </p:nvSpPr>
         <p:spPr>
           <a:xfrm>
-            <a:off x="7156909" y="3392602"/>
+            <a:off x="6457710" y="2470637"/>
             <a:ext cx="294132" cy="349250"/>
           </a:xfrm>
           <a:prstGeom prst="rect">
@@ -6075,7 +5978,7 @@
                 <a:ea typeface="맑은 고딕" pitchFamily="34" charset="-122"/>
                 <a:cs typeface="맑은 고딕" pitchFamily="34" charset="-120"/>
               </a:rPr>
-              <a:t>1</a:t>
+              <a:t>4</a:t>
             </a:r>
             <a:endParaRPr lang="ko-KR" sz="2200" dirty="0"/>
           </a:p>
@@ -6083,13 +5986,13 @@
       </p:sp>
       <p:sp>
         <p:nvSpPr>
-          <p:cNvPr id="48" name="S13-label418"/>
+          <p:cNvPr id="45" name="S13-label400"/>
           <p:cNvSpPr txBox="1"/>
           <p:nvPr/>
         </p:nvSpPr>
         <p:spPr>
           <a:xfrm>
-            <a:off x="7156909" y="3055488"/>
+            <a:off x="6457710" y="1937717"/>
             <a:ext cx="294132" cy="349250"/>
           </a:xfrm>
           <a:prstGeom prst="rect">
@@ -6114,7 +6017,7 @@
                 <a:ea typeface="맑은 고딕" pitchFamily="34" charset="-122"/>
                 <a:cs typeface="맑은 고딕" pitchFamily="34" charset="-120"/>
               </a:rPr>
-              <a:t>2</a:t>
+              <a:t>6</a:t>
             </a:r>
             <a:endParaRPr lang="ko-KR" sz="2200" dirty="0"/>
           </a:p>
@@ -6122,14 +6025,14 @@
       </p:sp>
       <p:sp>
         <p:nvSpPr>
-          <p:cNvPr id="49" name="S13-label420"/>
+          <p:cNvPr id="46" name="S13-label402"/>
           <p:cNvSpPr txBox="1"/>
           <p:nvPr/>
         </p:nvSpPr>
         <p:spPr>
           <a:xfrm>
-            <a:off x="7156909" y="2718375"/>
-            <a:ext cx="294132" cy="349250"/>
+            <a:off x="6189486" y="1493617"/>
+            <a:ext cx="830580" cy="349250"/>
           </a:xfrm>
           <a:prstGeom prst="rect">
             <a:avLst/>
@@ -6145,6 +6048,45 @@
               <a:buNone/>
             </a:pPr>
             <a:r>
+              <a:rPr lang="en-US" altLang="ko-KR" sz="2200" dirty="0">
+                <a:solidFill>
+                  <a:srgbClr val="1F2937"/>
+                </a:solidFill>
+                <a:latin typeface="맑은 고딕" pitchFamily="34" charset="0"/>
+                <a:ea typeface="맑은 고딕" pitchFamily="34" charset="-122"/>
+                <a:cs typeface="맑은 고딕" pitchFamily="34" charset="-120"/>
+              </a:rPr>
+              <a:t>(cm)</a:t>
+            </a:r>
+            <a:endParaRPr lang="ko-KR" sz="2200" dirty="0"/>
+          </a:p>
+        </p:txBody>
+      </p:sp>
+      <p:sp>
+        <p:nvSpPr>
+          <p:cNvPr id="47" name="S13-label404"/>
+          <p:cNvSpPr txBox="1"/>
+          <p:nvPr/>
+        </p:nvSpPr>
+        <p:spPr>
+          <a:xfrm>
+            <a:off x="7364439" y="3825143"/>
+            <a:ext cx="567944" cy="349250"/>
+          </a:xfrm>
+          <a:prstGeom prst="rect">
+            <a:avLst/>
+          </a:prstGeom>
+          <a:noFill/>
+          <a:ln/>
+        </p:spPr>
+        <p:txBody>
+          <a:bodyPr wrap="square" lIns="0" tIns="0" rIns="0" bIns="0" rtlCol="0" anchor="ctr"/>
+          <a:lstStyle/>
+          <a:p>
+            <a:pPr eaLnBrk="0" algn="ctr" indent="0" marL="0">
+              <a:buNone/>
+            </a:pPr>
+            <a:r>
               <a:rPr lang="ko-KR" altLang="en-US" sz="2200" dirty="0">
                 <a:solidFill>
                   <a:srgbClr val="1F2937"/>
@@ -6153,7 +6095,7 @@
                 <a:ea typeface="맑은 고딕" pitchFamily="34" charset="-122"/>
                 <a:cs typeface="맑은 고딕" pitchFamily="34" charset="-120"/>
               </a:rPr>
-              <a:t>3</a:t>
+              <a:t>1주</a:t>
             </a:r>
             <a:endParaRPr lang="ko-KR" sz="2200" dirty="0"/>
           </a:p>
@@ -6161,14 +6103,14 @@
       </p:sp>
       <p:sp>
         <p:nvSpPr>
-          <p:cNvPr id="50" name="S13-label422"/>
+          <p:cNvPr id="48" name="S13-label406"/>
           <p:cNvSpPr txBox="1"/>
           <p:nvPr/>
         </p:nvSpPr>
         <p:spPr>
           <a:xfrm>
-            <a:off x="7156909" y="2381261"/>
-            <a:ext cx="294132" cy="349250"/>
+            <a:off x="8430279" y="3825143"/>
+            <a:ext cx="567944" cy="349250"/>
           </a:xfrm>
           <a:prstGeom prst="rect">
             <a:avLst/>
@@ -6192,7 +6134,7 @@
                 <a:ea typeface="맑은 고딕" pitchFamily="34" charset="-122"/>
                 <a:cs typeface="맑은 고딕" pitchFamily="34" charset="-120"/>
               </a:rPr>
-              <a:t>4</a:t>
+              <a:t>2주</a:t>
             </a:r>
             <a:endParaRPr lang="ko-KR" sz="2200" dirty="0"/>
           </a:p>
@@ -6200,14 +6142,14 @@
       </p:sp>
       <p:sp>
         <p:nvSpPr>
-          <p:cNvPr id="51" name="S13-label424"/>
+          <p:cNvPr id="49" name="S13-label408"/>
           <p:cNvSpPr txBox="1"/>
           <p:nvPr/>
         </p:nvSpPr>
         <p:spPr>
           <a:xfrm>
-            <a:off x="7156909" y="2044148"/>
-            <a:ext cx="294132" cy="349250"/>
+            <a:off x="9496120" y="3825143"/>
+            <a:ext cx="567944" cy="349250"/>
           </a:xfrm>
           <a:prstGeom prst="rect">
             <a:avLst/>
@@ -6231,7 +6173,7 @@
                 <a:ea typeface="맑은 고딕" pitchFamily="34" charset="-122"/>
                 <a:cs typeface="맑은 고딕" pitchFamily="34" charset="-120"/>
               </a:rPr>
-              <a:t>5</a:t>
+              <a:t>3주</a:t>
             </a:r>
             <a:endParaRPr lang="ko-KR" sz="2200" dirty="0"/>
           </a:p>
@@ -6239,14 +6181,14 @@
       </p:sp>
       <p:sp>
         <p:nvSpPr>
-          <p:cNvPr id="52" name="S13-label426"/>
+          <p:cNvPr id="50" name="S13-label410"/>
           <p:cNvSpPr txBox="1"/>
           <p:nvPr/>
         </p:nvSpPr>
         <p:spPr>
           <a:xfrm>
-            <a:off x="7156909" y="1707034"/>
-            <a:ext cx="294132" cy="349250"/>
+            <a:off x="10561960" y="3825143"/>
+            <a:ext cx="567944" cy="349250"/>
           </a:xfrm>
           <a:prstGeom prst="rect">
             <a:avLst/>
@@ -6270,7 +6212,7 @@
                 <a:ea typeface="맑은 고딕" pitchFamily="34" charset="-122"/>
                 <a:cs typeface="맑은 고딕" pitchFamily="34" charset="-120"/>
               </a:rPr>
-              <a:t>6</a:t>
+              <a:t>4주</a:t>
             </a:r>
             <a:endParaRPr lang="ko-KR" sz="2200" dirty="0"/>
           </a:p>
@@ -6278,202 +6220,7 @@
       </p:sp>
       <p:sp>
         <p:nvSpPr>
-          <p:cNvPr id="53" name="S13-label428"/>
-          <p:cNvSpPr txBox="1"/>
-          <p:nvPr/>
-        </p:nvSpPr>
-        <p:spPr>
-          <a:xfrm>
-            <a:off x="6888685" y="1369920"/>
-            <a:ext cx="830580" cy="349250"/>
-          </a:xfrm>
-          <a:prstGeom prst="rect">
-            <a:avLst/>
-          </a:prstGeom>
-          <a:noFill/>
-          <a:ln/>
-        </p:spPr>
-        <p:txBody>
-          <a:bodyPr wrap="square" lIns="0" tIns="0" rIns="0" bIns="0" rtlCol="0" anchor="ctr"/>
-          <a:lstStyle/>
-          <a:p>
-            <a:pPr eaLnBrk="0" algn="ctr" indent="0" marL="0">
-              <a:buNone/>
-            </a:pPr>
-            <a:r>
-              <a:rPr lang="en-US" altLang="ko-KR" sz="2200" dirty="0">
-                <a:solidFill>
-                  <a:srgbClr val="1F2937"/>
-                </a:solidFill>
-                <a:latin typeface="맑은 고딕" pitchFamily="34" charset="0"/>
-                <a:ea typeface="맑은 고딕" pitchFamily="34" charset="-122"/>
-                <a:cs typeface="맑은 고딕" pitchFamily="34" charset="-120"/>
-              </a:rPr>
-              <a:t>(cm)</a:t>
-            </a:r>
-            <a:endParaRPr lang="ko-KR" sz="2200" dirty="0"/>
-          </a:p>
-        </p:txBody>
-      </p:sp>
-      <p:sp>
-        <p:nvSpPr>
-          <p:cNvPr id="54" name="S13-label430"/>
-          <p:cNvSpPr txBox="1"/>
-          <p:nvPr/>
-        </p:nvSpPr>
-        <p:spPr>
-          <a:xfrm>
-            <a:off x="7778509" y="3948840"/>
-            <a:ext cx="567944" cy="349250"/>
-          </a:xfrm>
-          <a:prstGeom prst="rect">
-            <a:avLst/>
-          </a:prstGeom>
-          <a:noFill/>
-          <a:ln/>
-        </p:spPr>
-        <p:txBody>
-          <a:bodyPr wrap="square" lIns="0" tIns="0" rIns="0" bIns="0" rtlCol="0" anchor="ctr"/>
-          <a:lstStyle/>
-          <a:p>
-            <a:pPr eaLnBrk="0" algn="ctr" indent="0" marL="0">
-              <a:buNone/>
-            </a:pPr>
-            <a:r>
-              <a:rPr lang="ko-KR" altLang="en-US" sz="2200" dirty="0">
-                <a:solidFill>
-                  <a:srgbClr val="1F2937"/>
-                </a:solidFill>
-                <a:latin typeface="맑은 고딕" pitchFamily="34" charset="0"/>
-                <a:ea typeface="맑은 고딕" pitchFamily="34" charset="-122"/>
-                <a:cs typeface="맑은 고딕" pitchFamily="34" charset="-120"/>
-              </a:rPr>
-              <a:t>1주</a:t>
-            </a:r>
-            <a:endParaRPr lang="ko-KR" sz="2200" dirty="0"/>
-          </a:p>
-        </p:txBody>
-      </p:sp>
-      <p:sp>
-        <p:nvSpPr>
-          <p:cNvPr id="55" name="S13-label432"/>
-          <p:cNvSpPr txBox="1"/>
-          <p:nvPr/>
-        </p:nvSpPr>
-        <p:spPr>
-          <a:xfrm>
-            <a:off x="8520159" y="3948840"/>
-            <a:ext cx="567944" cy="349250"/>
-          </a:xfrm>
-          <a:prstGeom prst="rect">
-            <a:avLst/>
-          </a:prstGeom>
-          <a:noFill/>
-          <a:ln/>
-        </p:spPr>
-        <p:txBody>
-          <a:bodyPr wrap="square" lIns="0" tIns="0" rIns="0" bIns="0" rtlCol="0" anchor="ctr"/>
-          <a:lstStyle/>
-          <a:p>
-            <a:pPr eaLnBrk="0" algn="ctr" indent="0" marL="0">
-              <a:buNone/>
-            </a:pPr>
-            <a:r>
-              <a:rPr lang="ko-KR" altLang="en-US" sz="2200" dirty="0">
-                <a:solidFill>
-                  <a:srgbClr val="1F2937"/>
-                </a:solidFill>
-                <a:latin typeface="맑은 고딕" pitchFamily="34" charset="0"/>
-                <a:ea typeface="맑은 고딕" pitchFamily="34" charset="-122"/>
-                <a:cs typeface="맑은 고딕" pitchFamily="34" charset="-120"/>
-              </a:rPr>
-              <a:t>2주</a:t>
-            </a:r>
-            <a:endParaRPr lang="ko-KR" sz="2200" dirty="0"/>
-          </a:p>
-        </p:txBody>
-      </p:sp>
-      <p:sp>
-        <p:nvSpPr>
-          <p:cNvPr id="56" name="S13-label434"/>
-          <p:cNvSpPr txBox="1"/>
-          <p:nvPr/>
-        </p:nvSpPr>
-        <p:spPr>
-          <a:xfrm>
-            <a:off x="9261809" y="3948840"/>
-            <a:ext cx="567944" cy="349250"/>
-          </a:xfrm>
-          <a:prstGeom prst="rect">
-            <a:avLst/>
-          </a:prstGeom>
-          <a:noFill/>
-          <a:ln/>
-        </p:spPr>
-        <p:txBody>
-          <a:bodyPr wrap="square" lIns="0" tIns="0" rIns="0" bIns="0" rtlCol="0" anchor="ctr"/>
-          <a:lstStyle/>
-          <a:p>
-            <a:pPr eaLnBrk="0" algn="ctr" indent="0" marL="0">
-              <a:buNone/>
-            </a:pPr>
-            <a:r>
-              <a:rPr lang="ko-KR" altLang="en-US" sz="2200" dirty="0">
-                <a:solidFill>
-                  <a:srgbClr val="1F2937"/>
-                </a:solidFill>
-                <a:latin typeface="맑은 고딕" pitchFamily="34" charset="0"/>
-                <a:ea typeface="맑은 고딕" pitchFamily="34" charset="-122"/>
-                <a:cs typeface="맑은 고딕" pitchFamily="34" charset="-120"/>
-              </a:rPr>
-              <a:t>3주</a:t>
-            </a:r>
-            <a:endParaRPr lang="ko-KR" sz="2200" dirty="0"/>
-          </a:p>
-        </p:txBody>
-      </p:sp>
-      <p:sp>
-        <p:nvSpPr>
-          <p:cNvPr id="57" name="S13-label436"/>
-          <p:cNvSpPr txBox="1"/>
-          <p:nvPr/>
-        </p:nvSpPr>
-        <p:spPr>
-          <a:xfrm>
-            <a:off x="10003459" y="3948840"/>
-            <a:ext cx="567944" cy="349250"/>
-          </a:xfrm>
-          <a:prstGeom prst="rect">
-            <a:avLst/>
-          </a:prstGeom>
-          <a:noFill/>
-          <a:ln/>
-        </p:spPr>
-        <p:txBody>
-          <a:bodyPr wrap="square" lIns="0" tIns="0" rIns="0" bIns="0" rtlCol="0" anchor="ctr"/>
-          <a:lstStyle/>
-          <a:p>
-            <a:pPr eaLnBrk="0" algn="ctr" indent="0" marL="0">
-              <a:buNone/>
-            </a:pPr>
-            <a:r>
-              <a:rPr lang="ko-KR" altLang="en-US" sz="2200" dirty="0">
-                <a:solidFill>
-                  <a:srgbClr val="1F2937"/>
-                </a:solidFill>
-                <a:latin typeface="맑은 고딕" pitchFamily="34" charset="0"/>
-                <a:ea typeface="맑은 고딕" pitchFamily="34" charset="-122"/>
-                <a:cs typeface="맑은 고딕" pitchFamily="34" charset="-120"/>
-              </a:rPr>
-              <a:t>4주</a:t>
-            </a:r>
-            <a:endParaRPr lang="ko-KR" sz="2200" dirty="0"/>
-          </a:p>
-        </p:txBody>
-      </p:sp>
-      <p:sp>
-        <p:nvSpPr>
-          <p:cNvPr id="58" name="S13-label437"/>
+          <p:cNvPr id="51" name="S13-label411"/>
           <p:cNvSpPr txBox="1"/>
           <p:nvPr/>
         </p:nvSpPr>
@@ -8376,20 +8123,20 @@
         </p:nvSpPr>
         <p:spPr>
           <a:xfrm>
-            <a:off x="548640" y="4696968"/>
-            <a:ext cx="5431536" cy="1520952"/>
+            <a:off x="548640" y="5349240"/>
+            <a:ext cx="11091672" cy="868680"/>
           </a:xfrm>
           <a:prstGeom prst="roundRect">
             <a:avLst>
-              <a:gd name="adj" fmla="val 7214"/>
+              <a:gd name="adj" fmla="val 12632"/>
             </a:avLst>
           </a:prstGeom>
           <a:solidFill>
-            <a:srgbClr val="EAF3F1"/>
+            <a:srgbClr val="FDEBDD"/>
           </a:solidFill>
           <a:ln w="12700">
             <a:solidFill>
-              <a:srgbClr val="EAF3F1"/>
+              <a:srgbClr val="FDEBDD"/>
             </a:solidFill>
             <a:prstDash val="solid"/>
           </a:ln>
@@ -8403,8 +8150,8 @@
         </p:nvSpPr>
         <p:spPr>
           <a:xfrm>
-            <a:off x="822960" y="4834128"/>
-            <a:ext cx="4882896" cy="1246632"/>
+            <a:off x="822960" y="5486400"/>
+            <a:ext cx="10543032" cy="594360"/>
           </a:xfrm>
           <a:prstGeom prst="rect">
             <a:avLst/>
@@ -8423,179 +8170,30 @@
               <a:buNone/>
             </a:pPr>
             <a:r>
-              <a:rPr lang="ko-KR" altLang="en-US" sz="2800" b="1" dirty="0">
-                <a:solidFill>
-                  <a:srgbClr val="1F2937"/>
-                </a:solidFill>
-                <a:latin typeface="맑은 고딕" pitchFamily="34" charset="0"/>
-                <a:ea typeface="맑은 고딕" pitchFamily="34" charset="-122"/>
-                <a:cs typeface="맑은 고딕" pitchFamily="34" charset="-120"/>
-              </a:rPr>
-              <a:t>막대그래프</a:t>
+              <a:rPr lang="ko-KR" altLang="en-US" sz="2800" dirty="0">
+                <a:solidFill>
+                  <a:srgbClr val="1F2937"/>
+                </a:solidFill>
+                <a:latin typeface="맑은 고딕" pitchFamily="34" charset="0"/>
+                <a:ea typeface="맑은 고딕" pitchFamily="34" charset="-122"/>
+                <a:cs typeface="맑은 고딕" pitchFamily="34" charset="-120"/>
+              </a:rPr>
+              <a:t>알고 싶은 것에 따라 알맞은 그래프가 달라요.</a:t>
             </a:r>
             <a:endParaRPr lang="ko-KR" sz="2800" dirty="0"/>
           </a:p>
-          <a:p>
-            <a:pPr eaLnBrk="0" indent="0" marL="0">
-              <a:spcAft>
-                <a:spcPts val="600"/>
-              </a:spcAft>
-              <a:buNone/>
-            </a:pPr>
-            <a:r>
-              <a:rPr lang="ko-KR" altLang="en-US" sz="2200" dirty="0">
-                <a:solidFill>
-                  <a:srgbClr val="1F2937"/>
-                </a:solidFill>
-                <a:latin typeface="맑은 고딕" pitchFamily="34" charset="0"/>
-                <a:ea typeface="맑은 고딕" pitchFamily="34" charset="-122"/>
-                <a:cs typeface="맑은 고딕" pitchFamily="34" charset="-120"/>
-              </a:rPr>
-              <a:t>몇 권인지, 어느 것이</a:t>
-            </a:r>
-            <a:endParaRPr lang="ko-KR" sz="2800" dirty="0"/>
-          </a:p>
-          <a:p>
-            <a:pPr eaLnBrk="0" indent="0" marL="0">
-              <a:spcAft>
-                <a:spcPts val="600"/>
-              </a:spcAft>
-              <a:buNone/>
-            </a:pPr>
-            <a:r>
-              <a:rPr lang="ko-KR" altLang="en-US" sz="2200" dirty="0">
-                <a:solidFill>
-                  <a:srgbClr val="1F2937"/>
-                </a:solidFill>
-                <a:latin typeface="맑은 고딕" pitchFamily="34" charset="0"/>
-                <a:ea typeface="맑은 고딕" pitchFamily="34" charset="-122"/>
-                <a:cs typeface="맑은 고딕" pitchFamily="34" charset="-120"/>
-              </a:rPr>
-              <a:t>더 많은지 비교해요.</a:t>
-            </a:r>
-            <a:endParaRPr lang="ko-KR" sz="2800" dirty="0"/>
-          </a:p>
-        </p:txBody>
-      </p:sp>
-      <p:sp>
-        <p:nvSpPr>
-          <p:cNvPr id="6" name="S03-card47"/>
-          <p:cNvSpPr/>
-          <p:nvPr/>
-        </p:nvSpPr>
-        <p:spPr>
-          <a:xfrm>
-            <a:off x="6208776" y="4696968"/>
-            <a:ext cx="5431536" cy="1520952"/>
-          </a:xfrm>
-          <a:prstGeom prst="roundRect">
-            <a:avLst>
-              <a:gd name="adj" fmla="val 7214"/>
-            </a:avLst>
-          </a:prstGeom>
-          <a:solidFill>
-            <a:srgbClr val="EAF3F1"/>
-          </a:solidFill>
-          <a:ln w="12700">
-            <a:solidFill>
-              <a:srgbClr val="EAF3F1"/>
-            </a:solidFill>
-            <a:prstDash val="solid"/>
-          </a:ln>
-        </p:spPr>
-      </p:sp>
-      <p:sp>
-        <p:nvSpPr>
-          <p:cNvPr id="7" name="S03-cardtext48"/>
-          <p:cNvSpPr txBox="1"/>
-          <p:nvPr/>
-        </p:nvSpPr>
-        <p:spPr>
-          <a:xfrm>
-            <a:off x="6483096" y="4834128"/>
-            <a:ext cx="4882896" cy="1246632"/>
-          </a:xfrm>
-          <a:prstGeom prst="rect">
-            <a:avLst/>
-          </a:prstGeom>
-          <a:noFill/>
-          <a:ln/>
-        </p:spPr>
-        <p:txBody>
-          <a:bodyPr wrap="square" lIns="0" tIns="0" rIns="0" bIns="0" rtlCol="0" anchor="ctr"/>
-          <a:lstStyle/>
-          <a:p>
-            <a:pPr eaLnBrk="0" indent="0" marL="0">
-              <a:spcAft>
-                <a:spcPts val="600"/>
-              </a:spcAft>
-              <a:buNone/>
-            </a:pPr>
-            <a:r>
-              <a:rPr lang="ko-KR" altLang="en-US" sz="2800" b="1" dirty="0">
-                <a:solidFill>
-                  <a:srgbClr val="1F2937"/>
-                </a:solidFill>
-                <a:latin typeface="맑은 고딕" pitchFamily="34" charset="0"/>
-                <a:ea typeface="맑은 고딕" pitchFamily="34" charset="-122"/>
-                <a:cs typeface="맑은 고딕" pitchFamily="34" charset="-120"/>
-              </a:rPr>
-              <a:t>띠그래프</a:t>
-            </a:r>
-            <a:endParaRPr lang="ko-KR" sz="2800" dirty="0"/>
-          </a:p>
-          <a:p>
-            <a:pPr eaLnBrk="0" indent="0" marL="0">
-              <a:spcAft>
-                <a:spcPts val="600"/>
-              </a:spcAft>
-              <a:buNone/>
-            </a:pPr>
-            <a:r>
-              <a:rPr lang="ko-KR" altLang="en-US" sz="2200" dirty="0">
-                <a:solidFill>
-                  <a:srgbClr val="1F2937"/>
-                </a:solidFill>
-                <a:latin typeface="맑은 고딕" pitchFamily="34" charset="0"/>
-                <a:ea typeface="맑은 고딕" pitchFamily="34" charset="-122"/>
-                <a:cs typeface="맑은 고딕" pitchFamily="34" charset="-120"/>
-              </a:rPr>
-              <a:t>전체의 몇 %인지</a:t>
-            </a:r>
-            <a:endParaRPr lang="ko-KR" sz="2800" dirty="0"/>
-          </a:p>
-          <a:p>
-            <a:pPr eaLnBrk="0" indent="0" marL="0">
-              <a:spcAft>
-                <a:spcPts val="600"/>
-              </a:spcAft>
-              <a:buNone/>
-            </a:pPr>
-            <a:r>
-              <a:rPr lang="ko-KR" altLang="en-US" sz="2200" dirty="0">
-                <a:solidFill>
-                  <a:srgbClr val="1F2937"/>
-                </a:solidFill>
-                <a:latin typeface="맑은 고딕" pitchFamily="34" charset="0"/>
-                <a:ea typeface="맑은 고딕" pitchFamily="34" charset="-122"/>
-                <a:cs typeface="맑은 고딕" pitchFamily="34" charset="-120"/>
-              </a:rPr>
-              <a:t>한눈에 보여요.</a:t>
-            </a:r>
-            <a:endParaRPr lang="ko-KR" sz="2800" dirty="0"/>
-          </a:p>
-        </p:txBody>
-      </p:sp>
-      <p:sp>
-        <p:nvSpPr>
-          <p:cNvPr id="8" name="S03-figure49" descr="막대그래프(세로 눈금 한 칸 1권): 동화 7권, 과학 6권, 역사 4권, 만화 3권"/>
-          <p:cNvSpPr/>
-          <p:nvPr/>
-        </p:nvSpPr>
-        <p:spPr>
-          <a:xfrm>
-            <a:off x="2726886" y="2517787"/>
-            <a:ext cx="211143" cy="1231669"/>
+        </p:txBody>
+      </p:sp>
+      <p:sp>
+        <p:nvSpPr>
+          <p:cNvPr id="6" name="S03-figure47" descr="막대그래프(세로 눈금 한 칸 1권): 동화 7권, 과학 5권, 역사 4권, 만화 4권"/>
+          <p:cNvSpPr/>
+          <p:nvPr/>
+        </p:nvSpPr>
+        <p:spPr>
+          <a:xfrm>
+            <a:off x="1711376" y="2925826"/>
+            <a:ext cx="569366" cy="1162456"/>
           </a:xfrm>
           <a:custGeom>
             <a:avLst/>
@@ -8604,15 +8202,15 @@
             <a:cxnLst/>
             <a:rect l="l" t="t" r="r" b="b"/>
             <a:pathLst>
-              <a:path w="211143" h="1231669">
+              <a:path w="569366" h="1162456">
                 <a:moveTo>
-                  <a:pt x="0" y="1231669"/>
+                  <a:pt x="0" y="1162456"/>
                 </a:moveTo>
                 <a:lnTo>
-                  <a:pt x="211143" y="1231669"/>
-                </a:lnTo>
-                <a:lnTo>
-                  <a:pt x="211143" y="0"/>
+                  <a:pt x="569366" y="1162456"/>
+                </a:lnTo>
+                <a:lnTo>
+                  <a:pt x="569366" y="0"/>
                 </a:lnTo>
                 <a:lnTo>
                   <a:pt x="0" y="0"/>
@@ -8634,14 +8232,14 @@
       </p:sp>
       <p:sp>
         <p:nvSpPr>
-          <p:cNvPr id="9" name="S03-mark50"/>
-          <p:cNvSpPr/>
-          <p:nvPr/>
-        </p:nvSpPr>
-        <p:spPr>
-          <a:xfrm>
-            <a:off x="3078792" y="2693739"/>
-            <a:ext cx="211143" cy="1055716"/>
+          <p:cNvPr id="7" name="S03-mark48"/>
+          <p:cNvSpPr/>
+          <p:nvPr/>
+        </p:nvSpPr>
+        <p:spPr>
+          <a:xfrm>
+            <a:off x="2755214" y="3257956"/>
+            <a:ext cx="569366" cy="830326"/>
           </a:xfrm>
           <a:custGeom>
             <a:avLst/>
@@ -8650,15 +8248,15 @@
             <a:cxnLst/>
             <a:rect l="l" t="t" r="r" b="b"/>
             <a:pathLst>
-              <a:path w="211143" h="1055716">
+              <a:path w="569366" h="830326">
                 <a:moveTo>
-                  <a:pt x="0" y="1055716"/>
+                  <a:pt x="0" y="830326"/>
                 </a:moveTo>
                 <a:lnTo>
-                  <a:pt x="211143" y="1055716"/>
-                </a:lnTo>
-                <a:lnTo>
-                  <a:pt x="211143" y="0"/>
+                  <a:pt x="569366" y="830326"/>
+                </a:lnTo>
+                <a:lnTo>
+                  <a:pt x="569366" y="0"/>
                 </a:lnTo>
                 <a:lnTo>
                   <a:pt x="0" y="0"/>
@@ -8680,14 +8278,14 @@
       </p:sp>
       <p:sp>
         <p:nvSpPr>
-          <p:cNvPr id="10" name="S03-mark51"/>
-          <p:cNvSpPr/>
-          <p:nvPr/>
-        </p:nvSpPr>
-        <p:spPr>
-          <a:xfrm>
-            <a:off x="3430697" y="3045645"/>
-            <a:ext cx="211143" cy="703811"/>
+          <p:cNvPr id="8" name="S03-mark49"/>
+          <p:cNvSpPr/>
+          <p:nvPr/>
+        </p:nvSpPr>
+        <p:spPr>
+          <a:xfrm>
+            <a:off x="3799053" y="3424022"/>
+            <a:ext cx="569366" cy="664261"/>
           </a:xfrm>
           <a:custGeom>
             <a:avLst/>
@@ -8696,15 +8294,15 @@
             <a:cxnLst/>
             <a:rect l="l" t="t" r="r" b="b"/>
             <a:pathLst>
-              <a:path w="211143" h="703811">
+              <a:path w="569366" h="664261">
                 <a:moveTo>
-                  <a:pt x="0" y="703811"/>
+                  <a:pt x="0" y="664261"/>
                 </a:moveTo>
                 <a:lnTo>
-                  <a:pt x="211143" y="703811"/>
-                </a:lnTo>
-                <a:lnTo>
-                  <a:pt x="211143" y="0"/>
+                  <a:pt x="569366" y="664261"/>
+                </a:lnTo>
+                <a:lnTo>
+                  <a:pt x="569366" y="0"/>
                 </a:lnTo>
                 <a:lnTo>
                   <a:pt x="0" y="0"/>
@@ -8726,14 +8324,14 @@
       </p:sp>
       <p:sp>
         <p:nvSpPr>
-          <p:cNvPr id="11" name="S03-mark52"/>
-          <p:cNvSpPr/>
-          <p:nvPr/>
-        </p:nvSpPr>
-        <p:spPr>
-          <a:xfrm>
-            <a:off x="3782603" y="3221597"/>
-            <a:ext cx="211143" cy="527858"/>
+          <p:cNvPr id="9" name="S03-mark50"/>
+          <p:cNvSpPr/>
+          <p:nvPr/>
+        </p:nvSpPr>
+        <p:spPr>
+          <a:xfrm>
+            <a:off x="4842891" y="3424022"/>
+            <a:ext cx="569366" cy="664261"/>
           </a:xfrm>
           <a:custGeom>
             <a:avLst/>
@@ -8742,15 +8340,15 @@
             <a:cxnLst/>
             <a:rect l="l" t="t" r="r" b="b"/>
             <a:pathLst>
-              <a:path w="211143" h="527858">
+              <a:path w="569366" h="664261">
                 <a:moveTo>
-                  <a:pt x="0" y="527858"/>
+                  <a:pt x="0" y="664261"/>
                 </a:moveTo>
                 <a:lnTo>
-                  <a:pt x="211143" y="527858"/>
-                </a:lnTo>
-                <a:lnTo>
-                  <a:pt x="211143" y="0"/>
+                  <a:pt x="569366" y="664261"/>
+                </a:lnTo>
+                <a:lnTo>
+                  <a:pt x="569366" y="0"/>
                 </a:lnTo>
                 <a:lnTo>
                   <a:pt x="0" y="0"/>
@@ -8772,14 +8370,60 @@
       </p:sp>
       <p:sp>
         <p:nvSpPr>
+          <p:cNvPr id="10" name="S03-mark51"/>
+          <p:cNvSpPr/>
+          <p:nvPr/>
+        </p:nvSpPr>
+        <p:spPr>
+          <a:xfrm>
+            <a:off x="1331798" y="3922217"/>
+            <a:ext cx="4460037" cy="0"/>
+          </a:xfrm>
+          <a:prstGeom prst="line">
+            <a:avLst/>
+          </a:prstGeom>
+          <a:noFill/>
+          <a:ln w="9525">
+            <a:solidFill>
+              <a:srgbClr val="B8C2CC"/>
+            </a:solidFill>
+            <a:prstDash val="solid"/>
+          </a:ln>
+        </p:spPr>
+      </p:sp>
+      <p:sp>
+        <p:nvSpPr>
+          <p:cNvPr id="11" name="S03-mark52"/>
+          <p:cNvSpPr/>
+          <p:nvPr/>
+        </p:nvSpPr>
+        <p:spPr>
+          <a:xfrm>
+            <a:off x="1331798" y="3756152"/>
+            <a:ext cx="4460037" cy="0"/>
+          </a:xfrm>
+          <a:prstGeom prst="line">
+            <a:avLst/>
+          </a:prstGeom>
+          <a:noFill/>
+          <a:ln w="9525">
+            <a:solidFill>
+              <a:srgbClr val="B8C2CC"/>
+            </a:solidFill>
+            <a:prstDash val="solid"/>
+          </a:ln>
+        </p:spPr>
+      </p:sp>
+      <p:sp>
+        <p:nvSpPr>
           <p:cNvPr id="12" name="S03-mark53"/>
           <p:cNvSpPr/>
           <p:nvPr/>
         </p:nvSpPr>
         <p:spPr>
           <a:xfrm>
-            <a:off x="2603719" y="3573503"/>
-            <a:ext cx="1513193" cy="0"/>
+            <a:off x="1331798" y="3590087"/>
+            <a:ext cx="4460037" cy="0"/>
           </a:xfrm>
           <a:prstGeom prst="line">
             <a:avLst/>
@@ -8801,8 +8445,8 @@
         </p:nvSpPr>
         <p:spPr>
           <a:xfrm>
-            <a:off x="2603719" y="3397550"/>
-            <a:ext cx="1513193" cy="0"/>
+            <a:off x="1331798" y="3424022"/>
+            <a:ext cx="4460037" cy="0"/>
           </a:xfrm>
           <a:prstGeom prst="line">
             <a:avLst/>
@@ -8824,8 +8468,8 @@
         </p:nvSpPr>
         <p:spPr>
           <a:xfrm>
-            <a:off x="2603719" y="3221597"/>
-            <a:ext cx="1513193" cy="0"/>
+            <a:off x="1331798" y="3257956"/>
+            <a:ext cx="4460037" cy="0"/>
           </a:xfrm>
           <a:prstGeom prst="line">
             <a:avLst/>
@@ -8847,8 +8491,8 @@
         </p:nvSpPr>
         <p:spPr>
           <a:xfrm>
-            <a:off x="2603719" y="3045645"/>
-            <a:ext cx="1513193" cy="0"/>
+            <a:off x="1331798" y="3091891"/>
+            <a:ext cx="4460037" cy="0"/>
           </a:xfrm>
           <a:prstGeom prst="line">
             <a:avLst/>
@@ -8870,8 +8514,8 @@
         </p:nvSpPr>
         <p:spPr>
           <a:xfrm>
-            <a:off x="2603719" y="2869692"/>
-            <a:ext cx="1513193" cy="0"/>
+            <a:off x="1331798" y="2925826"/>
+            <a:ext cx="4460037" cy="0"/>
           </a:xfrm>
           <a:prstGeom prst="line">
             <a:avLst/>
@@ -8893,8 +8537,8 @@
         </p:nvSpPr>
         <p:spPr>
           <a:xfrm>
-            <a:off x="2603719" y="2693739"/>
-            <a:ext cx="1513193" cy="0"/>
+            <a:off x="1331798" y="2759761"/>
+            <a:ext cx="4460037" cy="0"/>
           </a:xfrm>
           <a:prstGeom prst="line">
             <a:avLst/>
@@ -8916,16 +8560,16 @@
         </p:nvSpPr>
         <p:spPr>
           <a:xfrm>
-            <a:off x="2603719" y="2517787"/>
-            <a:ext cx="1513193" cy="0"/>
+            <a:off x="1331798" y="4088282"/>
+            <a:ext cx="4460037" cy="0"/>
           </a:xfrm>
           <a:prstGeom prst="line">
             <a:avLst/>
           </a:prstGeom>
           <a:noFill/>
-          <a:ln w="9525">
-            <a:solidFill>
-              <a:srgbClr val="B8C2CC"/>
+          <a:ln w="19050">
+            <a:solidFill>
+              <a:srgbClr val="1F2937"/>
             </a:solidFill>
             <a:prstDash val="solid"/>
           </a:ln>
@@ -8938,37 +8582,14 @@
           <p:nvPr/>
         </p:nvSpPr>
         <p:spPr>
-          <a:xfrm>
-            <a:off x="2603719" y="2341834"/>
-            <a:ext cx="1513193" cy="0"/>
+          <a:xfrm flipV="1">
+            <a:off x="1331798" y="2569972"/>
+            <a:ext cx="0" cy="1518310"/>
           </a:xfrm>
           <a:prstGeom prst="line">
             <a:avLst/>
           </a:prstGeom>
           <a:noFill/>
-          <a:ln w="9525">
-            <a:solidFill>
-              <a:srgbClr val="B8C2CC"/>
-            </a:solidFill>
-            <a:prstDash val="solid"/>
-          </a:ln>
-        </p:spPr>
-      </p:sp>
-      <p:sp>
-        <p:nvSpPr>
-          <p:cNvPr id="20" name="S03-mark61"/>
-          <p:cNvSpPr/>
-          <p:nvPr/>
-        </p:nvSpPr>
-        <p:spPr>
-          <a:xfrm>
-            <a:off x="2603719" y="3749456"/>
-            <a:ext cx="1513193" cy="0"/>
-          </a:xfrm>
-          <a:prstGeom prst="line">
-            <a:avLst/>
-          </a:prstGeom>
-          <a:noFill/>
           <a:ln w="19050">
             <a:solidFill>
               <a:srgbClr val="1F2937"/>
@@ -8979,36 +8600,13 @@
       </p:sp>
       <p:sp>
         <p:nvSpPr>
-          <p:cNvPr id="21" name="S03-mark62"/>
-          <p:cNvSpPr/>
-          <p:nvPr/>
-        </p:nvSpPr>
-        <p:spPr>
-          <a:xfrm flipV="1">
-            <a:off x="2603719" y="2271453"/>
-            <a:ext cx="0" cy="1478003"/>
-          </a:xfrm>
-          <a:prstGeom prst="line">
-            <a:avLst/>
-          </a:prstGeom>
-          <a:noFill/>
-          <a:ln w="19050">
-            <a:solidFill>
-              <a:srgbClr val="1F2937"/>
-            </a:solidFill>
-            <a:prstDash val="solid"/>
-          </a:ln>
-        </p:spPr>
-      </p:sp>
-      <p:sp>
-        <p:nvSpPr>
-          <p:cNvPr id="22" name="S03-label64"/>
+          <p:cNvPr id="20" name="S03-label62"/>
           <p:cNvSpPr txBox="1"/>
           <p:nvPr/>
         </p:nvSpPr>
         <p:spPr>
           <a:xfrm>
-            <a:off x="2307094" y="3574831"/>
+            <a:off x="781431" y="3913657"/>
             <a:ext cx="294132" cy="349250"/>
           </a:xfrm>
           <a:prstGeom prst="rect">
@@ -9041,13 +8639,13 @@
       </p:sp>
       <p:sp>
         <p:nvSpPr>
-          <p:cNvPr id="23" name="S03-label66"/>
+          <p:cNvPr id="21" name="S03-label64"/>
           <p:cNvSpPr txBox="1"/>
           <p:nvPr/>
         </p:nvSpPr>
         <p:spPr>
           <a:xfrm>
-            <a:off x="2307094" y="3222925"/>
+            <a:off x="781431" y="3581527"/>
             <a:ext cx="294132" cy="349250"/>
           </a:xfrm>
           <a:prstGeom prst="rect">
@@ -9080,13 +8678,13 @@
       </p:sp>
       <p:sp>
         <p:nvSpPr>
-          <p:cNvPr id="24" name="S03-label68"/>
+          <p:cNvPr id="22" name="S03-label66"/>
           <p:cNvSpPr txBox="1"/>
           <p:nvPr/>
         </p:nvSpPr>
         <p:spPr>
           <a:xfrm>
-            <a:off x="2307094" y="2871020"/>
+            <a:off x="781431" y="3249397"/>
             <a:ext cx="294132" cy="349250"/>
           </a:xfrm>
           <a:prstGeom prst="rect">
@@ -9119,13 +8717,13 @@
       </p:sp>
       <p:sp>
         <p:nvSpPr>
-          <p:cNvPr id="25" name="S03-label70"/>
+          <p:cNvPr id="23" name="S03-label68"/>
           <p:cNvSpPr txBox="1"/>
           <p:nvPr/>
         </p:nvSpPr>
         <p:spPr>
           <a:xfrm>
-            <a:off x="2307094" y="2519114"/>
+            <a:off x="781431" y="2917266"/>
             <a:ext cx="294132" cy="349250"/>
           </a:xfrm>
           <a:prstGeom prst="rect">
@@ -9158,13 +8756,13 @@
       </p:sp>
       <p:sp>
         <p:nvSpPr>
-          <p:cNvPr id="26" name="S03-label72"/>
+          <p:cNvPr id="24" name="S03-label70"/>
           <p:cNvSpPr txBox="1"/>
           <p:nvPr/>
         </p:nvSpPr>
         <p:spPr>
           <a:xfrm>
-            <a:off x="2307094" y="2167209"/>
+            <a:off x="781431" y="2585136"/>
             <a:ext cx="294132" cy="349250"/>
           </a:xfrm>
           <a:prstGeom prst="rect">
@@ -9197,13 +8795,13 @@
       </p:sp>
       <p:sp>
         <p:nvSpPr>
-          <p:cNvPr id="27" name="S03-label74"/>
+          <p:cNvPr id="25" name="S03-label72"/>
           <p:cNvSpPr txBox="1"/>
           <p:nvPr/>
         </p:nvSpPr>
         <p:spPr>
           <a:xfrm>
-            <a:off x="2094750" y="1991256"/>
+            <a:off x="569087" y="2110664"/>
             <a:ext cx="718820" cy="349250"/>
           </a:xfrm>
           <a:prstGeom prst="rect">
@@ -9236,13 +8834,13 @@
       </p:sp>
       <p:sp>
         <p:nvSpPr>
-          <p:cNvPr id="28" name="S03-label76"/>
+          <p:cNvPr id="26" name="S03-label74"/>
           <p:cNvSpPr txBox="1"/>
           <p:nvPr/>
         </p:nvSpPr>
         <p:spPr>
           <a:xfrm>
-            <a:off x="2503782" y="3689200"/>
+            <a:off x="1667383" y="4222064"/>
             <a:ext cx="657352" cy="349250"/>
           </a:xfrm>
           <a:prstGeom prst="rect">
@@ -9275,13 +8873,13 @@
       </p:sp>
       <p:sp>
         <p:nvSpPr>
-          <p:cNvPr id="29" name="S03-label78"/>
+          <p:cNvPr id="27" name="S03-label76"/>
           <p:cNvSpPr txBox="1"/>
           <p:nvPr/>
         </p:nvSpPr>
         <p:spPr>
           <a:xfrm>
-            <a:off x="2855687" y="3689200"/>
+            <a:off x="2711221" y="4222064"/>
             <a:ext cx="657352" cy="349250"/>
           </a:xfrm>
           <a:prstGeom prst="rect">
@@ -9314,13 +8912,13 @@
       </p:sp>
       <p:sp>
         <p:nvSpPr>
-          <p:cNvPr id="30" name="S03-label80"/>
+          <p:cNvPr id="28" name="S03-label78"/>
           <p:cNvSpPr txBox="1"/>
           <p:nvPr/>
         </p:nvSpPr>
         <p:spPr>
           <a:xfrm>
-            <a:off x="3207593" y="3689200"/>
+            <a:off x="3755060" y="4222064"/>
             <a:ext cx="657352" cy="349250"/>
           </a:xfrm>
           <a:prstGeom prst="rect">
@@ -9353,13 +8951,13 @@
       </p:sp>
       <p:sp>
         <p:nvSpPr>
-          <p:cNvPr id="31" name="S03-label82"/>
+          <p:cNvPr id="29" name="S03-label80"/>
           <p:cNvSpPr txBox="1"/>
           <p:nvPr/>
         </p:nvSpPr>
         <p:spPr>
           <a:xfrm>
-            <a:off x="3559498" y="3689200"/>
+            <a:off x="4798898" y="4222064"/>
             <a:ext cx="657352" cy="349250"/>
           </a:xfrm>
           <a:prstGeom prst="rect">
@@ -9392,13 +8990,13 @@
       </p:sp>
       <p:sp>
         <p:nvSpPr>
-          <p:cNvPr id="32" name="S03-label83"/>
+          <p:cNvPr id="30" name="S03-label81"/>
           <p:cNvSpPr txBox="1"/>
           <p:nvPr/>
         </p:nvSpPr>
         <p:spPr>
           <a:xfrm>
-            <a:off x="548640" y="4091178"/>
+            <a:off x="548640" y="4743450"/>
             <a:ext cx="5385816" cy="377190"/>
           </a:xfrm>
           <a:prstGeom prst="rect">
@@ -9423,7 +9021,7 @@
                 <a:ea typeface="맑은 고딕" pitchFamily="34" charset="-122"/>
                 <a:cs typeface="맑은 고딕" pitchFamily="34" charset="-120"/>
               </a:rPr>
-              <a:t>막대그래프</a:t>
+              <a:t>막대그래프: 몇 권인지 비교</a:t>
             </a:r>
             <a:endParaRPr lang="ko-KR" sz="2200" dirty="0"/>
           </a:p>
@@ -9431,13 +9029,13 @@
       </p:sp>
       <p:sp>
         <p:nvSpPr>
-          <p:cNvPr id="33" name="S03-figure84" descr="같은 자료의 띠그래프: 동화 35 %, 과학 30 %, 역사 20 %, 만화 15 %"/>
-          <p:cNvSpPr/>
-          <p:nvPr/>
-        </p:nvSpPr>
-        <p:spPr>
-          <a:xfrm>
-            <a:off x="6338316" y="2452019"/>
+          <p:cNvPr id="31" name="S03-figure82" descr="같은 자료의 띠그래프: 동화 35 %, 과학 25 %, 역사 20 %, 만화 20 %"/>
+          <p:cNvSpPr/>
+          <p:nvPr/>
+        </p:nvSpPr>
+        <p:spPr>
+          <a:xfrm>
+            <a:off x="6338316" y="2778155"/>
             <a:ext cx="1595076" cy="820325"/>
           </a:xfrm>
           <a:custGeom>
@@ -9477,14 +9075,14 @@
       </p:sp>
       <p:sp>
         <p:nvSpPr>
-          <p:cNvPr id="34" name="S03-mark85"/>
-          <p:cNvSpPr/>
-          <p:nvPr/>
-        </p:nvSpPr>
-        <p:spPr>
-          <a:xfrm>
-            <a:off x="7933392" y="2452019"/>
-            <a:ext cx="1367208" cy="820325"/>
+          <p:cNvPr id="32" name="S03-mark83"/>
+          <p:cNvSpPr/>
+          <p:nvPr/>
+        </p:nvSpPr>
+        <p:spPr>
+          <a:xfrm>
+            <a:off x="7933392" y="2778155"/>
+            <a:ext cx="1139340" cy="820325"/>
           </a:xfrm>
           <a:custGeom>
             <a:avLst/>
@@ -9493,15 +9091,15 @@
             <a:cxnLst/>
             <a:rect l="l" t="t" r="r" b="b"/>
             <a:pathLst>
-              <a:path w="1367208" h="820325">
+              <a:path w="1139340" h="820325">
                 <a:moveTo>
                   <a:pt x="0" y="820325"/>
                 </a:moveTo>
                 <a:lnTo>
-                  <a:pt x="1367208" y="820325"/>
-                </a:lnTo>
-                <a:lnTo>
-                  <a:pt x="1367208" y="0"/>
+                  <a:pt x="1139340" y="820325"/>
+                </a:lnTo>
+                <a:lnTo>
+                  <a:pt x="1139340" y="0"/>
                 </a:lnTo>
                 <a:lnTo>
                   <a:pt x="0" y="0"/>
@@ -9523,13 +9121,13 @@
       </p:sp>
       <p:sp>
         <p:nvSpPr>
-          <p:cNvPr id="35" name="S03-mark86"/>
-          <p:cNvSpPr/>
-          <p:nvPr/>
-        </p:nvSpPr>
-        <p:spPr>
-          <a:xfrm>
-            <a:off x="9300599" y="2452019"/>
+          <p:cNvPr id="33" name="S03-mark84"/>
+          <p:cNvSpPr/>
+          <p:nvPr/>
+        </p:nvSpPr>
+        <p:spPr>
+          <a:xfrm>
+            <a:off x="9072731" y="2778155"/>
             <a:ext cx="911472" cy="820325"/>
           </a:xfrm>
           <a:custGeom>
@@ -9569,14 +9167,14 @@
       </p:sp>
       <p:sp>
         <p:nvSpPr>
-          <p:cNvPr id="36" name="S03-mark87"/>
-          <p:cNvSpPr/>
-          <p:nvPr/>
-        </p:nvSpPr>
-        <p:spPr>
-          <a:xfrm>
-            <a:off x="10212071" y="2452019"/>
-            <a:ext cx="683604" cy="820325"/>
+          <p:cNvPr id="34" name="S03-mark85"/>
+          <p:cNvSpPr/>
+          <p:nvPr/>
+        </p:nvSpPr>
+        <p:spPr>
+          <a:xfrm>
+            <a:off x="9984203" y="2778155"/>
+            <a:ext cx="911472" cy="820325"/>
           </a:xfrm>
           <a:custGeom>
             <a:avLst/>
@@ -9585,15 +9183,15 @@
             <a:cxnLst/>
             <a:rect l="l" t="t" r="r" b="b"/>
             <a:pathLst>
-              <a:path w="683604" h="820325">
+              <a:path w="911472" h="820325">
                 <a:moveTo>
                   <a:pt x="0" y="820325"/>
                 </a:moveTo>
                 <a:lnTo>
-                  <a:pt x="683604" y="820325"/>
-                </a:lnTo>
-                <a:lnTo>
-                  <a:pt x="683604" y="0"/>
+                  <a:pt x="911472" y="820325"/>
+                </a:lnTo>
+                <a:lnTo>
+                  <a:pt x="911472" y="0"/>
                 </a:lnTo>
                 <a:lnTo>
                   <a:pt x="0" y="0"/>
@@ -9615,14 +9213,60 @@
       </p:sp>
       <p:sp>
         <p:nvSpPr>
+          <p:cNvPr id="35" name="S03-mark86"/>
+          <p:cNvSpPr/>
+          <p:nvPr/>
+        </p:nvSpPr>
+        <p:spPr>
+          <a:xfrm>
+            <a:off x="6338316" y="3653168"/>
+            <a:ext cx="4557359" cy="0"/>
+          </a:xfrm>
+          <a:prstGeom prst="line">
+            <a:avLst/>
+          </a:prstGeom>
+          <a:noFill/>
+          <a:ln w="12700">
+            <a:solidFill>
+              <a:srgbClr val="B8C2CC"/>
+            </a:solidFill>
+            <a:prstDash val="solid"/>
+          </a:ln>
+        </p:spPr>
+      </p:sp>
+      <p:sp>
+        <p:nvSpPr>
+          <p:cNvPr id="36" name="S03-mark87"/>
+          <p:cNvSpPr/>
+          <p:nvPr/>
+        </p:nvSpPr>
+        <p:spPr>
+          <a:xfrm>
+            <a:off x="6338316" y="3653168"/>
+            <a:ext cx="0" cy="100262"/>
+          </a:xfrm>
+          <a:prstGeom prst="line">
+            <a:avLst/>
+          </a:prstGeom>
+          <a:noFill/>
+          <a:ln w="12700">
+            <a:solidFill>
+              <a:srgbClr val="B8C2CC"/>
+            </a:solidFill>
+            <a:prstDash val="solid"/>
+          </a:ln>
+        </p:spPr>
+      </p:sp>
+      <p:sp>
+        <p:nvSpPr>
           <p:cNvPr id="37" name="S03-mark88"/>
           <p:cNvSpPr/>
           <p:nvPr/>
         </p:nvSpPr>
         <p:spPr>
           <a:xfrm>
-            <a:off x="6338316" y="3327032"/>
-            <a:ext cx="4557359" cy="0"/>
+            <a:off x="6566184" y="3653168"/>
+            <a:ext cx="0" cy="54688"/>
           </a:xfrm>
           <a:prstGeom prst="line">
             <a:avLst/>
@@ -9644,7 +9288,7 @@
         </p:nvSpPr>
         <p:spPr>
           <a:xfrm>
-            <a:off x="6338316" y="3327032"/>
+            <a:off x="6794052" y="3653168"/>
             <a:ext cx="0" cy="100262"/>
           </a:xfrm>
           <a:prstGeom prst="line">
@@ -9667,7 +9311,7 @@
         </p:nvSpPr>
         <p:spPr>
           <a:xfrm>
-            <a:off x="6566184" y="3327032"/>
+            <a:off x="7021920" y="3653168"/>
             <a:ext cx="0" cy="54688"/>
           </a:xfrm>
           <a:prstGeom prst="line">
@@ -9690,7 +9334,7 @@
         </p:nvSpPr>
         <p:spPr>
           <a:xfrm>
-            <a:off x="6794052" y="3327032"/>
+            <a:off x="7249788" y="3653168"/>
             <a:ext cx="0" cy="100262"/>
           </a:xfrm>
           <a:prstGeom prst="line">
@@ -9713,7 +9357,7 @@
         </p:nvSpPr>
         <p:spPr>
           <a:xfrm>
-            <a:off x="7021920" y="3327032"/>
+            <a:off x="7477656" y="3653168"/>
             <a:ext cx="0" cy="54688"/>
           </a:xfrm>
           <a:prstGeom prst="line">
@@ -9736,7 +9380,7 @@
         </p:nvSpPr>
         <p:spPr>
           <a:xfrm>
-            <a:off x="7249788" y="3327032"/>
+            <a:off x="7705524" y="3653168"/>
             <a:ext cx="0" cy="100262"/>
           </a:xfrm>
           <a:prstGeom prst="line">
@@ -9759,7 +9403,7 @@
         </p:nvSpPr>
         <p:spPr>
           <a:xfrm>
-            <a:off x="7477656" y="3327032"/>
+            <a:off x="7933392" y="3653168"/>
             <a:ext cx="0" cy="54688"/>
           </a:xfrm>
           <a:prstGeom prst="line">
@@ -9782,7 +9426,7 @@
         </p:nvSpPr>
         <p:spPr>
           <a:xfrm>
-            <a:off x="7705524" y="3327032"/>
+            <a:off x="8161260" y="3653168"/>
             <a:ext cx="0" cy="100262"/>
           </a:xfrm>
           <a:prstGeom prst="line">
@@ -9805,7 +9449,7 @@
         </p:nvSpPr>
         <p:spPr>
           <a:xfrm>
-            <a:off x="7933392" y="3327032"/>
+            <a:off x="8389128" y="3653168"/>
             <a:ext cx="0" cy="54688"/>
           </a:xfrm>
           <a:prstGeom prst="line">
@@ -9828,7 +9472,7 @@
         </p:nvSpPr>
         <p:spPr>
           <a:xfrm>
-            <a:off x="8161260" y="3327032"/>
+            <a:off x="8616995" y="3653168"/>
             <a:ext cx="0" cy="100262"/>
           </a:xfrm>
           <a:prstGeom prst="line">
@@ -9851,7 +9495,7 @@
         </p:nvSpPr>
         <p:spPr>
           <a:xfrm>
-            <a:off x="8389128" y="3327032"/>
+            <a:off x="8844863" y="3653168"/>
             <a:ext cx="0" cy="54688"/>
           </a:xfrm>
           <a:prstGeom prst="line">
@@ -9874,7 +9518,7 @@
         </p:nvSpPr>
         <p:spPr>
           <a:xfrm>
-            <a:off x="8616995" y="3327032"/>
+            <a:off x="9072731" y="3653168"/>
             <a:ext cx="0" cy="100262"/>
           </a:xfrm>
           <a:prstGeom prst="line">
@@ -9897,7 +9541,7 @@
         </p:nvSpPr>
         <p:spPr>
           <a:xfrm>
-            <a:off x="8844863" y="3327032"/>
+            <a:off x="9300599" y="3653168"/>
             <a:ext cx="0" cy="54688"/>
           </a:xfrm>
           <a:prstGeom prst="line">
@@ -9920,7 +9564,7 @@
         </p:nvSpPr>
         <p:spPr>
           <a:xfrm>
-            <a:off x="9072731" y="3327032"/>
+            <a:off x="9528467" y="3653168"/>
             <a:ext cx="0" cy="100262"/>
           </a:xfrm>
           <a:prstGeom prst="line">
@@ -9943,7 +9587,7 @@
         </p:nvSpPr>
         <p:spPr>
           <a:xfrm>
-            <a:off x="9300599" y="3327032"/>
+            <a:off x="9756335" y="3653168"/>
             <a:ext cx="0" cy="54688"/>
           </a:xfrm>
           <a:prstGeom prst="line">
@@ -9966,7 +9610,7 @@
         </p:nvSpPr>
         <p:spPr>
           <a:xfrm>
-            <a:off x="9528467" y="3327032"/>
+            <a:off x="9984203" y="3653168"/>
             <a:ext cx="0" cy="100262"/>
           </a:xfrm>
           <a:prstGeom prst="line">
@@ -9989,7 +9633,7 @@
         </p:nvSpPr>
         <p:spPr>
           <a:xfrm>
-            <a:off x="9756335" y="3327032"/>
+            <a:off x="10212071" y="3653168"/>
             <a:ext cx="0" cy="54688"/>
           </a:xfrm>
           <a:prstGeom prst="line">
@@ -10012,7 +9656,7 @@
         </p:nvSpPr>
         <p:spPr>
           <a:xfrm>
-            <a:off x="9984203" y="3327032"/>
+            <a:off x="10439939" y="3653168"/>
             <a:ext cx="0" cy="100262"/>
           </a:xfrm>
           <a:prstGeom prst="line">
@@ -10035,7 +9679,7 @@
         </p:nvSpPr>
         <p:spPr>
           <a:xfrm>
-            <a:off x="10212071" y="3327032"/>
+            <a:off x="10667807" y="3653168"/>
             <a:ext cx="0" cy="54688"/>
           </a:xfrm>
           <a:prstGeom prst="line">
@@ -10058,7 +9702,7 @@
         </p:nvSpPr>
         <p:spPr>
           <a:xfrm>
-            <a:off x="10439939" y="3327032"/>
+            <a:off x="10895675" y="3653168"/>
             <a:ext cx="0" cy="100262"/>
           </a:xfrm>
           <a:prstGeom prst="line">
@@ -10075,59 +9719,13 @@
       </p:sp>
       <p:sp>
         <p:nvSpPr>
-          <p:cNvPr id="57" name="S03-mark108"/>
-          <p:cNvSpPr/>
-          <p:nvPr/>
-        </p:nvSpPr>
-        <p:spPr>
-          <a:xfrm>
-            <a:off x="10667807" y="3327032"/>
-            <a:ext cx="0" cy="54688"/>
-          </a:xfrm>
-          <a:prstGeom prst="line">
-            <a:avLst/>
-          </a:prstGeom>
-          <a:noFill/>
-          <a:ln w="12700">
-            <a:solidFill>
-              <a:srgbClr val="B8C2CC"/>
-            </a:solidFill>
-            <a:prstDash val="solid"/>
-          </a:ln>
-        </p:spPr>
-      </p:sp>
-      <p:sp>
-        <p:nvSpPr>
-          <p:cNvPr id="58" name="S03-mark109"/>
-          <p:cNvSpPr/>
-          <p:nvPr/>
-        </p:nvSpPr>
-        <p:spPr>
-          <a:xfrm>
-            <a:off x="10895675" y="3327032"/>
-            <a:ext cx="0" cy="100262"/>
-          </a:xfrm>
-          <a:prstGeom prst="line">
-            <a:avLst/>
-          </a:prstGeom>
-          <a:noFill/>
-          <a:ln w="12700">
-            <a:solidFill>
-              <a:srgbClr val="B8C2CC"/>
-            </a:solidFill>
-            <a:prstDash val="solid"/>
-          </a:ln>
-        </p:spPr>
-      </p:sp>
-      <p:sp>
-        <p:nvSpPr>
-          <p:cNvPr id="59" name="S03-label111"/>
+          <p:cNvPr id="57" name="S03-label109"/>
           <p:cNvSpPr txBox="1"/>
           <p:nvPr/>
         </p:nvSpPr>
         <p:spPr>
           <a:xfrm>
-            <a:off x="6555718" y="2512931"/>
+            <a:off x="6555718" y="2839067"/>
             <a:ext cx="1160272" cy="698500"/>
           </a:xfrm>
           <a:prstGeom prst="rect">
@@ -10177,13 +9775,13 @@
       </p:sp>
       <p:sp>
         <p:nvSpPr>
-          <p:cNvPr id="60" name="S03-label113"/>
+          <p:cNvPr id="58" name="S03-label111"/>
           <p:cNvSpPr txBox="1"/>
           <p:nvPr/>
         </p:nvSpPr>
         <p:spPr>
           <a:xfrm>
-            <a:off x="8036859" y="2512931"/>
+            <a:off x="7922926" y="2839067"/>
             <a:ext cx="1160272" cy="698500"/>
           </a:xfrm>
           <a:prstGeom prst="rect">
@@ -10225,7 +9823,7 @@
                 <a:ea typeface="맑은 고딕" pitchFamily="34" charset="-122"/>
                 <a:cs typeface="맑은 고딕" pitchFamily="34" charset="-120"/>
               </a:rPr>
-              <a:t>30 %</a:t>
+              <a:t>25 %</a:t>
             </a:r>
             <a:endParaRPr lang="ko-KR" sz="2200" dirty="0"/>
           </a:p>
@@ -10233,13 +9831,13 @@
       </p:sp>
       <p:sp>
         <p:nvSpPr>
-          <p:cNvPr id="61" name="S03-label115"/>
+          <p:cNvPr id="59" name="S03-label113"/>
           <p:cNvSpPr txBox="1"/>
           <p:nvPr/>
         </p:nvSpPr>
         <p:spPr>
           <a:xfrm>
-            <a:off x="9176199" y="2512931"/>
+            <a:off x="8948331" y="2839067"/>
             <a:ext cx="1160272" cy="698500"/>
           </a:xfrm>
           <a:prstGeom prst="rect">
@@ -10289,13 +9887,13 @@
       </p:sp>
       <p:sp>
         <p:nvSpPr>
-          <p:cNvPr id="62" name="S03-label117"/>
+          <p:cNvPr id="60" name="S03-label115"/>
           <p:cNvSpPr txBox="1"/>
           <p:nvPr/>
         </p:nvSpPr>
         <p:spPr>
           <a:xfrm>
-            <a:off x="9973737" y="2512931"/>
+            <a:off x="9859803" y="2839067"/>
             <a:ext cx="1160272" cy="698500"/>
           </a:xfrm>
           <a:prstGeom prst="rect">
@@ -10337,7 +9935,7 @@
                 <a:ea typeface="맑은 고딕" pitchFamily="34" charset="-122"/>
                 <a:cs typeface="맑은 고딕" pitchFamily="34" charset="-120"/>
               </a:rPr>
-              <a:t>15 %</a:t>
+              <a:t>20 %</a:t>
             </a:r>
             <a:endParaRPr lang="ko-KR" sz="2200" dirty="0"/>
           </a:p>
@@ -10345,13 +9943,13 @@
       </p:sp>
       <p:sp>
         <p:nvSpPr>
-          <p:cNvPr id="63" name="S03-label119"/>
+          <p:cNvPr id="61" name="S03-label117"/>
           <p:cNvSpPr txBox="1"/>
           <p:nvPr/>
         </p:nvSpPr>
         <p:spPr>
           <a:xfrm>
-            <a:off x="6191250" y="3403062"/>
+            <a:off x="6191250" y="3729198"/>
             <a:ext cx="294132" cy="349250"/>
           </a:xfrm>
           <a:prstGeom prst="rect">
@@ -10384,13 +9982,13 @@
       </p:sp>
       <p:sp>
         <p:nvSpPr>
-          <p:cNvPr id="64" name="S03-label121"/>
+          <p:cNvPr id="62" name="S03-label119"/>
           <p:cNvSpPr txBox="1"/>
           <p:nvPr/>
         </p:nvSpPr>
         <p:spPr>
           <a:xfrm>
-            <a:off x="7010520" y="3403062"/>
+            <a:off x="7010520" y="3729198"/>
             <a:ext cx="478536" cy="349250"/>
           </a:xfrm>
           <a:prstGeom prst="rect">
@@ -10423,13 +10021,13 @@
       </p:sp>
       <p:sp>
         <p:nvSpPr>
-          <p:cNvPr id="65" name="S03-label123"/>
+          <p:cNvPr id="63" name="S03-label121"/>
           <p:cNvSpPr txBox="1"/>
           <p:nvPr/>
         </p:nvSpPr>
         <p:spPr>
           <a:xfrm>
-            <a:off x="7921992" y="3403062"/>
+            <a:off x="7921992" y="3729198"/>
             <a:ext cx="478536" cy="349250"/>
           </a:xfrm>
           <a:prstGeom prst="rect">
@@ -10462,13 +10060,13 @@
       </p:sp>
       <p:sp>
         <p:nvSpPr>
-          <p:cNvPr id="66" name="S03-label125"/>
+          <p:cNvPr id="64" name="S03-label123"/>
           <p:cNvSpPr txBox="1"/>
           <p:nvPr/>
         </p:nvSpPr>
         <p:spPr>
           <a:xfrm>
-            <a:off x="8833463" y="3403062"/>
+            <a:off x="8833463" y="3729198"/>
             <a:ext cx="478536" cy="349250"/>
           </a:xfrm>
           <a:prstGeom prst="rect">
@@ -10501,13 +10099,13 @@
       </p:sp>
       <p:sp>
         <p:nvSpPr>
-          <p:cNvPr id="67" name="S03-label127"/>
+          <p:cNvPr id="65" name="S03-label125"/>
           <p:cNvSpPr txBox="1"/>
           <p:nvPr/>
         </p:nvSpPr>
         <p:spPr>
           <a:xfrm>
-            <a:off x="9744935" y="3403062"/>
+            <a:off x="9744935" y="3729198"/>
             <a:ext cx="478536" cy="349250"/>
           </a:xfrm>
           <a:prstGeom prst="rect">
@@ -10540,13 +10138,13 @@
       </p:sp>
       <p:sp>
         <p:nvSpPr>
-          <p:cNvPr id="68" name="S03-label129"/>
+          <p:cNvPr id="66" name="S03-label127"/>
           <p:cNvSpPr txBox="1"/>
           <p:nvPr/>
         </p:nvSpPr>
         <p:spPr>
           <a:xfrm>
-            <a:off x="10564205" y="3403062"/>
+            <a:off x="10564205" y="3729198"/>
             <a:ext cx="662940" cy="349250"/>
           </a:xfrm>
           <a:prstGeom prst="rect">
@@ -10579,14 +10177,14 @@
       </p:sp>
       <p:sp>
         <p:nvSpPr>
-          <p:cNvPr id="69" name="S03-label131"/>
+          <p:cNvPr id="67" name="S03-label129"/>
           <p:cNvSpPr txBox="1"/>
           <p:nvPr/>
         </p:nvSpPr>
         <p:spPr>
           <a:xfrm>
-            <a:off x="11070233" y="3403062"/>
-            <a:ext cx="562356" cy="349250"/>
+            <a:off x="10975237" y="3729198"/>
+            <a:ext cx="752348" cy="349250"/>
           </a:xfrm>
           <a:prstGeom prst="rect">
             <a:avLst/>
@@ -10618,13 +10216,13 @@
       </p:sp>
       <p:sp>
         <p:nvSpPr>
-          <p:cNvPr id="70" name="S03-label132"/>
+          <p:cNvPr id="68" name="S03-label130"/>
           <p:cNvSpPr txBox="1"/>
           <p:nvPr/>
         </p:nvSpPr>
         <p:spPr>
           <a:xfrm>
-            <a:off x="6254496" y="4091178"/>
+            <a:off x="6254496" y="4743450"/>
             <a:ext cx="5385816" cy="377190"/>
           </a:xfrm>
           <a:prstGeom prst="rect">
@@ -10649,7 +10247,7 @@
                 <a:ea typeface="맑은 고딕" pitchFamily="34" charset="-122"/>
                 <a:cs typeface="맑은 고딕" pitchFamily="34" charset="-120"/>
               </a:rPr>
-              <a:t>띠그래프</a:t>
+              <a:t>띠그래프: 전체의 몇 %인지</a:t>
             </a:r>
             <a:endParaRPr lang="ko-KR" sz="2200" dirty="0"/>
           </a:p>
@@ -10771,7 +10369,7 @@
       </p:sp>
       <p:sp>
         <p:nvSpPr>
-          <p:cNvPr id="3" name="S04-card133"/>
+          <p:cNvPr id="3" name="S04-card131"/>
           <p:cNvSpPr/>
           <p:nvPr/>
         </p:nvSpPr>
@@ -10798,7 +10396,7 @@
       </p:sp>
       <p:sp>
         <p:nvSpPr>
-          <p:cNvPr id="4" name="S04-cardtext134"/>
+          <p:cNvPr id="4" name="S04-cardtext132"/>
           <p:cNvSpPr txBox="1"/>
           <p:nvPr/>
         </p:nvSpPr>
@@ -10880,7 +10478,7 @@
       </p:sp>
       <p:sp>
         <p:nvSpPr>
-          <p:cNvPr id="5" name="S04-card135"/>
+          <p:cNvPr id="5" name="S04-card133"/>
           <p:cNvSpPr/>
           <p:nvPr/>
         </p:nvSpPr>
@@ -10907,7 +10505,7 @@
       </p:sp>
       <p:sp>
         <p:nvSpPr>
-          <p:cNvPr id="6" name="S04-cardtext136"/>
+          <p:cNvPr id="6" name="S04-cardtext134"/>
           <p:cNvSpPr txBox="1"/>
           <p:nvPr/>
         </p:nvSpPr>
@@ -10989,7 +10587,7 @@
       </p:sp>
       <p:sp>
         <p:nvSpPr>
-          <p:cNvPr id="7" name="S04-card137"/>
+          <p:cNvPr id="7" name="S04-card135"/>
           <p:cNvSpPr/>
           <p:nvPr/>
         </p:nvSpPr>
@@ -11016,7 +10614,7 @@
       </p:sp>
       <p:sp>
         <p:nvSpPr>
-          <p:cNvPr id="8" name="S04-cardtext138"/>
+          <p:cNvPr id="8" name="S04-cardtext136"/>
           <p:cNvSpPr txBox="1"/>
           <p:nvPr/>
         </p:nvSpPr>
@@ -11098,7 +10696,7 @@
       </p:sp>
       <p:sp>
         <p:nvSpPr>
-          <p:cNvPr id="9" name="S04-card139"/>
+          <p:cNvPr id="9" name="S04-card137"/>
           <p:cNvSpPr/>
           <p:nvPr/>
         </p:nvSpPr>
@@ -11125,7 +10723,7 @@
       </p:sp>
       <p:sp>
         <p:nvSpPr>
-          <p:cNvPr id="10" name="S04-cardtext140"/>
+          <p:cNvPr id="10" name="S04-cardtext138"/>
           <p:cNvSpPr txBox="1"/>
           <p:nvPr/>
         </p:nvSpPr>
@@ -11207,7 +10805,7 @@
       </p:sp>
       <p:sp>
         <p:nvSpPr>
-          <p:cNvPr id="11" name="S04-card141"/>
+          <p:cNvPr id="11" name="S04-card139"/>
           <p:cNvSpPr/>
           <p:nvPr/>
         </p:nvSpPr>
@@ -11234,7 +10832,7 @@
       </p:sp>
       <p:sp>
         <p:nvSpPr>
-          <p:cNvPr id="12" name="S04-cardtext142"/>
+          <p:cNvPr id="12" name="S04-cardtext140"/>
           <p:cNvSpPr txBox="1"/>
           <p:nvPr/>
         </p:nvSpPr>
@@ -11316,7 +10914,7 @@
       </p:sp>
       <p:sp>
         <p:nvSpPr>
-          <p:cNvPr id="13" name="S04-card143"/>
+          <p:cNvPr id="13" name="S04-card141"/>
           <p:cNvSpPr/>
           <p:nvPr/>
         </p:nvSpPr>
@@ -11343,7 +10941,7 @@
       </p:sp>
       <p:sp>
         <p:nvSpPr>
-          <p:cNvPr id="14" name="S04-cardtext144"/>
+          <p:cNvPr id="14" name="S04-cardtext142"/>
           <p:cNvSpPr txBox="1"/>
           <p:nvPr/>
         </p:nvSpPr>
@@ -11539,7 +11137,7 @@
       </p:sp>
       <p:sp>
         <p:nvSpPr>
-          <p:cNvPr id="3" name="S05-text145"/>
+          <p:cNvPr id="3" name="S05-text143"/>
           <p:cNvSpPr txBox="1"/>
           <p:nvPr/>
         </p:nvSpPr>
@@ -11578,7 +11176,7 @@
       </p:sp>
       <p:sp>
         <p:nvSpPr>
-          <p:cNvPr id="4" name="S05-card146"/>
+          <p:cNvPr id="4" name="S05-card144"/>
           <p:cNvSpPr/>
           <p:nvPr/>
         </p:nvSpPr>
@@ -11605,7 +11203,7 @@
       </p:sp>
       <p:sp>
         <p:nvSpPr>
-          <p:cNvPr id="5" name="S05-cardtext147"/>
+          <p:cNvPr id="5" name="S05-cardtext145"/>
           <p:cNvSpPr txBox="1"/>
           <p:nvPr/>
         </p:nvSpPr>
@@ -11647,7 +11245,7 @@
       </p:sp>
       <p:sp>
         <p:nvSpPr>
-          <p:cNvPr id="6" name="S05-chip148"/>
+          <p:cNvPr id="6" name="S05-chip146"/>
           <p:cNvSpPr txBox="1"/>
           <p:nvPr/>
         </p:nvSpPr>
@@ -11694,7 +11292,7 @@
       </p:sp>
       <p:sp>
         <p:nvSpPr>
-          <p:cNvPr id="7" name="S05-text149"/>
+          <p:cNvPr id="7" name="S05-text147"/>
           <p:cNvSpPr txBox="1"/>
           <p:nvPr/>
         </p:nvSpPr>
@@ -11750,7 +11348,7 @@
       </p:sp>
       <p:sp>
         <p:nvSpPr>
-          <p:cNvPr id="8" name="S05-chip150"/>
+          <p:cNvPr id="8" name="S05-chip148"/>
           <p:cNvSpPr txBox="1"/>
           <p:nvPr/>
         </p:nvSpPr>
@@ -11797,7 +11395,7 @@
       </p:sp>
       <p:sp>
         <p:nvSpPr>
-          <p:cNvPr id="9" name="S05-text151"/>
+          <p:cNvPr id="9" name="S05-text149"/>
           <p:cNvSpPr txBox="1"/>
           <p:nvPr/>
         </p:nvSpPr>
@@ -11853,7 +11451,7 @@
       </p:sp>
       <p:sp>
         <p:nvSpPr>
-          <p:cNvPr id="10" name="S05-chip152"/>
+          <p:cNvPr id="10" name="S05-chip150"/>
           <p:cNvSpPr txBox="1"/>
           <p:nvPr/>
         </p:nvSpPr>
@@ -11900,7 +11498,7 @@
       </p:sp>
       <p:sp>
         <p:nvSpPr>
-          <p:cNvPr id="11" name="S05-text153"/>
+          <p:cNvPr id="11" name="S05-text151"/>
           <p:cNvSpPr txBox="1"/>
           <p:nvPr/>
         </p:nvSpPr>
@@ -11956,7 +11554,7 @@
       </p:sp>
       <p:sp>
         <p:nvSpPr>
-          <p:cNvPr id="12" name="S05-chip154"/>
+          <p:cNvPr id="12" name="S05-chip152"/>
           <p:cNvSpPr txBox="1"/>
           <p:nvPr/>
         </p:nvSpPr>
@@ -12003,7 +11601,7 @@
       </p:sp>
       <p:sp>
         <p:nvSpPr>
-          <p:cNvPr id="13" name="S05-text155"/>
+          <p:cNvPr id="13" name="S05-text153"/>
           <p:cNvSpPr txBox="1"/>
           <p:nvPr/>
         </p:nvSpPr>
@@ -12173,7 +11771,7 @@
       </p:sp>
       <p:sp>
         <p:nvSpPr>
-          <p:cNvPr id="3" name="S06-card156"/>
+          <p:cNvPr id="3" name="S06-card154"/>
           <p:cNvSpPr/>
           <p:nvPr/>
         </p:nvSpPr>
@@ -12200,7 +11798,7 @@
       </p:sp>
       <p:sp>
         <p:nvSpPr>
-          <p:cNvPr id="4" name="S06-cardtext157"/>
+          <p:cNvPr id="4" name="S06-cardtext155"/>
           <p:cNvSpPr txBox="1"/>
           <p:nvPr/>
         </p:nvSpPr>
@@ -12242,7 +11840,7 @@
       </p:sp>
       <p:sp>
         <p:nvSpPr>
-          <p:cNvPr id="5" name="S06-card158"/>
+          <p:cNvPr id="5" name="S06-card156"/>
           <p:cNvSpPr/>
           <p:nvPr/>
         </p:nvSpPr>
@@ -12269,7 +11867,7 @@
       </p:sp>
       <p:sp>
         <p:nvSpPr>
-          <p:cNvPr id="6" name="S06-cardtext159"/>
+          <p:cNvPr id="6" name="S06-cardtext157"/>
           <p:cNvSpPr txBox="1"/>
           <p:nvPr/>
         </p:nvSpPr>
@@ -12311,7 +11909,7 @@
       </p:sp>
       <p:sp>
         <p:nvSpPr>
-          <p:cNvPr id="7" name="S06-chip160"/>
+          <p:cNvPr id="7" name="S06-chip158"/>
           <p:cNvSpPr txBox="1"/>
           <p:nvPr/>
         </p:nvSpPr>
@@ -12358,14 +11956,14 @@
       </p:sp>
       <p:sp>
         <p:nvSpPr>
-          <p:cNvPr id="8" name="S06-figure161" descr="좋아하는 과일별 학생 수를 꺾은선으로 이은 그래프: 사과 6, 배 3, 귤 7, 포도 4"/>
-          <p:cNvSpPr/>
-          <p:nvPr/>
-        </p:nvSpPr>
-        <p:spPr>
-          <a:xfrm>
-            <a:off x="2830013" y="3651511"/>
-            <a:ext cx="1032528" cy="688352"/>
+          <p:cNvPr id="8" name="S06-figure159" descr="좋아하는 과일별 학생 수를 꺾은선으로 이은 그래프: 사과 6, 배 3, 귤 7, 포도 4"/>
+          <p:cNvSpPr/>
+          <p:nvPr/>
+        </p:nvSpPr>
+        <p:spPr>
+          <a:xfrm>
+            <a:off x="2394615" y="3811416"/>
+            <a:ext cx="2100692" cy="509259"/>
           </a:xfrm>
           <a:custGeom>
             <a:avLst/>
@@ -12374,18 +11972,18 @@
             <a:cxnLst/>
             <a:rect l="l" t="t" r="r" b="b"/>
             <a:pathLst>
-              <a:path w="1032528" h="688352">
+              <a:path w="2100692" h="509259">
                 <a:moveTo>
-                  <a:pt x="0" y="172088"/>
+                  <a:pt x="0" y="127315"/>
                 </a:moveTo>
                 <a:lnTo>
-                  <a:pt x="344176" y="688352"/>
-                </a:lnTo>
-                <a:lnTo>
-                  <a:pt x="688352" y="0"/>
-                </a:lnTo>
-                <a:lnTo>
-                  <a:pt x="1032528" y="516264"/>
+                  <a:pt x="700231" y="509259"/>
+                </a:lnTo>
+                <a:lnTo>
+                  <a:pt x="1400462" y="0"/>
+                </a:lnTo>
+                <a:lnTo>
+                  <a:pt x="2100692" y="381944"/>
                 </a:lnTo>
               </a:path>
             </a:pathLst>
@@ -12401,14 +11999,14 @@
       </p:sp>
       <p:sp>
         <p:nvSpPr>
-          <p:cNvPr id="9" name="S06-mark162"/>
+          <p:cNvPr id="9" name="S06-mark160"/>
           <p:cNvSpPr/>
           <p:nvPr/>
         </p:nvSpPr>
         <p:spPr>
           <a:xfrm flipV="1">
-            <a:off x="2830013" y="3479423"/>
-            <a:ext cx="0" cy="1376704"/>
+            <a:off x="2394615" y="3684101"/>
+            <a:ext cx="0" cy="1018518"/>
           </a:xfrm>
           <a:prstGeom prst="line">
             <a:avLst/>
@@ -12424,14 +12022,14 @@
       </p:sp>
       <p:sp>
         <p:nvSpPr>
-          <p:cNvPr id="10" name="S06-mark163"/>
+          <p:cNvPr id="10" name="S06-mark161"/>
           <p:cNvSpPr/>
           <p:nvPr/>
         </p:nvSpPr>
         <p:spPr>
           <a:xfrm flipV="1">
-            <a:off x="3174189" y="3479423"/>
-            <a:ext cx="0" cy="1376704"/>
+            <a:off x="3094846" y="3684101"/>
+            <a:ext cx="0" cy="1018518"/>
           </a:xfrm>
           <a:prstGeom prst="line">
             <a:avLst/>
@@ -12447,14 +12045,14 @@
       </p:sp>
       <p:sp>
         <p:nvSpPr>
-          <p:cNvPr id="11" name="S06-mark164"/>
+          <p:cNvPr id="11" name="S06-mark162"/>
           <p:cNvSpPr/>
           <p:nvPr/>
         </p:nvSpPr>
         <p:spPr>
           <a:xfrm flipV="1">
-            <a:off x="3518365" y="3479423"/>
-            <a:ext cx="0" cy="1376704"/>
+            <a:off x="3795077" y="3684101"/>
+            <a:ext cx="0" cy="1018518"/>
           </a:xfrm>
           <a:prstGeom prst="line">
             <a:avLst/>
@@ -12470,14 +12068,14 @@
       </p:sp>
       <p:sp>
         <p:nvSpPr>
-          <p:cNvPr id="12" name="S06-mark165"/>
+          <p:cNvPr id="12" name="S06-mark163"/>
           <p:cNvSpPr/>
           <p:nvPr/>
         </p:nvSpPr>
         <p:spPr>
           <a:xfrm flipV="1">
-            <a:off x="3862542" y="3479423"/>
-            <a:ext cx="0" cy="1376704"/>
+            <a:off x="4495308" y="3684101"/>
+            <a:ext cx="0" cy="1018518"/>
           </a:xfrm>
           <a:prstGeom prst="line">
             <a:avLst/>
@@ -12493,14 +12091,14 @@
       </p:sp>
       <p:sp>
         <p:nvSpPr>
-          <p:cNvPr id="13" name="S06-mark166"/>
-          <p:cNvSpPr/>
-          <p:nvPr/>
-        </p:nvSpPr>
-        <p:spPr>
-          <a:xfrm>
-            <a:off x="2606299" y="4684040"/>
-            <a:ext cx="1479957" cy="0"/>
+          <p:cNvPr id="13" name="S06-mark164"/>
+          <p:cNvSpPr/>
+          <p:nvPr/>
+        </p:nvSpPr>
+        <p:spPr>
+          <a:xfrm>
+            <a:off x="1949014" y="4575304"/>
+            <a:ext cx="2991895" cy="0"/>
           </a:xfrm>
           <a:prstGeom prst="line">
             <a:avLst/>
@@ -12516,14 +12114,14 @@
       </p:sp>
       <p:sp>
         <p:nvSpPr>
-          <p:cNvPr id="14" name="S06-mark167"/>
-          <p:cNvSpPr/>
-          <p:nvPr/>
-        </p:nvSpPr>
-        <p:spPr>
-          <a:xfrm>
-            <a:off x="2606299" y="4511951"/>
-            <a:ext cx="1479957" cy="0"/>
+          <p:cNvPr id="14" name="S06-mark165"/>
+          <p:cNvSpPr/>
+          <p:nvPr/>
+        </p:nvSpPr>
+        <p:spPr>
+          <a:xfrm>
+            <a:off x="1949014" y="4447990"/>
+            <a:ext cx="2991895" cy="0"/>
           </a:xfrm>
           <a:prstGeom prst="line">
             <a:avLst/>
@@ -12539,14 +12137,14 @@
       </p:sp>
       <p:sp>
         <p:nvSpPr>
-          <p:cNvPr id="15" name="S06-mark168"/>
-          <p:cNvSpPr/>
-          <p:nvPr/>
-        </p:nvSpPr>
-        <p:spPr>
-          <a:xfrm>
-            <a:off x="2606299" y="4339863"/>
-            <a:ext cx="1479957" cy="0"/>
+          <p:cNvPr id="15" name="S06-mark166"/>
+          <p:cNvSpPr/>
+          <p:nvPr/>
+        </p:nvSpPr>
+        <p:spPr>
+          <a:xfrm>
+            <a:off x="1949014" y="4320675"/>
+            <a:ext cx="2991895" cy="0"/>
           </a:xfrm>
           <a:prstGeom prst="line">
             <a:avLst/>
@@ -12562,14 +12160,14 @@
       </p:sp>
       <p:sp>
         <p:nvSpPr>
-          <p:cNvPr id="16" name="S06-mark169"/>
-          <p:cNvSpPr/>
-          <p:nvPr/>
-        </p:nvSpPr>
-        <p:spPr>
-          <a:xfrm>
-            <a:off x="2606299" y="4167775"/>
-            <a:ext cx="1479957" cy="0"/>
+          <p:cNvPr id="16" name="S06-mark167"/>
+          <p:cNvSpPr/>
+          <p:nvPr/>
+        </p:nvSpPr>
+        <p:spPr>
+          <a:xfrm>
+            <a:off x="1949014" y="4193360"/>
+            <a:ext cx="2991895" cy="0"/>
           </a:xfrm>
           <a:prstGeom prst="line">
             <a:avLst/>
@@ -12585,14 +12183,14 @@
       </p:sp>
       <p:sp>
         <p:nvSpPr>
-          <p:cNvPr id="17" name="S06-mark170"/>
-          <p:cNvSpPr/>
-          <p:nvPr/>
-        </p:nvSpPr>
-        <p:spPr>
-          <a:xfrm>
-            <a:off x="2606299" y="3995687"/>
-            <a:ext cx="1479957" cy="0"/>
+          <p:cNvPr id="17" name="S06-mark168"/>
+          <p:cNvSpPr/>
+          <p:nvPr/>
+        </p:nvSpPr>
+        <p:spPr>
+          <a:xfrm>
+            <a:off x="1949014" y="4066045"/>
+            <a:ext cx="2991895" cy="0"/>
           </a:xfrm>
           <a:prstGeom prst="line">
             <a:avLst/>
@@ -12608,14 +12206,14 @@
       </p:sp>
       <p:sp>
         <p:nvSpPr>
-          <p:cNvPr id="18" name="S06-mark171"/>
-          <p:cNvSpPr/>
-          <p:nvPr/>
-        </p:nvSpPr>
-        <p:spPr>
-          <a:xfrm>
-            <a:off x="2606299" y="3823599"/>
-            <a:ext cx="1479957" cy="0"/>
+          <p:cNvPr id="18" name="S06-mark169"/>
+          <p:cNvSpPr/>
+          <p:nvPr/>
+        </p:nvSpPr>
+        <p:spPr>
+          <a:xfrm>
+            <a:off x="1949014" y="3938731"/>
+            <a:ext cx="2991895" cy="0"/>
           </a:xfrm>
           <a:prstGeom prst="line">
             <a:avLst/>
@@ -12631,14 +12229,14 @@
       </p:sp>
       <p:sp>
         <p:nvSpPr>
-          <p:cNvPr id="19" name="S06-mark172"/>
-          <p:cNvSpPr/>
-          <p:nvPr/>
-        </p:nvSpPr>
-        <p:spPr>
-          <a:xfrm>
-            <a:off x="2606299" y="3651511"/>
-            <a:ext cx="1479957" cy="0"/>
+          <p:cNvPr id="19" name="S06-mark170"/>
+          <p:cNvSpPr/>
+          <p:nvPr/>
+        </p:nvSpPr>
+        <p:spPr>
+          <a:xfrm>
+            <a:off x="1949014" y="3811416"/>
+            <a:ext cx="2991895" cy="0"/>
           </a:xfrm>
           <a:prstGeom prst="line">
             <a:avLst/>
@@ -12654,14 +12252,14 @@
       </p:sp>
       <p:sp>
         <p:nvSpPr>
-          <p:cNvPr id="20" name="S06-mark173"/>
-          <p:cNvSpPr/>
-          <p:nvPr/>
-        </p:nvSpPr>
-        <p:spPr>
-          <a:xfrm>
-            <a:off x="2606299" y="3479423"/>
-            <a:ext cx="1479957" cy="0"/>
+          <p:cNvPr id="20" name="S06-mark171"/>
+          <p:cNvSpPr/>
+          <p:nvPr/>
+        </p:nvSpPr>
+        <p:spPr>
+          <a:xfrm>
+            <a:off x="1949014" y="3684101"/>
+            <a:ext cx="2991895" cy="0"/>
           </a:xfrm>
           <a:prstGeom prst="line">
             <a:avLst/>
@@ -12677,14 +12275,14 @@
       </p:sp>
       <p:sp>
         <p:nvSpPr>
-          <p:cNvPr id="21" name="S06-mark174"/>
-          <p:cNvSpPr/>
-          <p:nvPr/>
-        </p:nvSpPr>
-        <p:spPr>
-          <a:xfrm>
-            <a:off x="2606299" y="4856128"/>
-            <a:ext cx="1479957" cy="0"/>
+          <p:cNvPr id="21" name="S06-mark172"/>
+          <p:cNvSpPr/>
+          <p:nvPr/>
+        </p:nvSpPr>
+        <p:spPr>
+          <a:xfrm>
+            <a:off x="1949014" y="4702619"/>
+            <a:ext cx="2991895" cy="0"/>
           </a:xfrm>
           <a:prstGeom prst="line">
             <a:avLst/>
@@ -12700,14 +12298,14 @@
       </p:sp>
       <p:sp>
         <p:nvSpPr>
-          <p:cNvPr id="22" name="S06-mark175"/>
+          <p:cNvPr id="22" name="S06-mark173"/>
           <p:cNvSpPr/>
           <p:nvPr/>
         </p:nvSpPr>
         <p:spPr>
           <a:xfrm flipV="1">
-            <a:off x="2606299" y="3410588"/>
-            <a:ext cx="0" cy="1445540"/>
+            <a:off x="1949014" y="3556787"/>
+            <a:ext cx="0" cy="1145832"/>
           </a:xfrm>
           <a:prstGeom prst="line">
             <a:avLst/>
@@ -12723,13 +12321,13 @@
       </p:sp>
       <p:sp>
         <p:nvSpPr>
-          <p:cNvPr id="23" name="S06-mark176"/>
-          <p:cNvSpPr/>
-          <p:nvPr/>
-        </p:nvSpPr>
-        <p:spPr>
-          <a:xfrm>
-            <a:off x="2770577" y="3764163"/>
+          <p:cNvPr id="23" name="S06-mark174"/>
+          <p:cNvSpPr/>
+          <p:nvPr/>
+        </p:nvSpPr>
+        <p:spPr>
+          <a:xfrm>
+            <a:off x="2335179" y="3879295"/>
             <a:ext cx="118872" cy="118872"/>
           </a:xfrm>
           <a:prstGeom prst="ellipse">
@@ -12748,13 +12346,13 @@
       </p:sp>
       <p:sp>
         <p:nvSpPr>
-          <p:cNvPr id="24" name="S06-mark177"/>
-          <p:cNvSpPr/>
-          <p:nvPr/>
-        </p:nvSpPr>
-        <p:spPr>
-          <a:xfrm>
-            <a:off x="3114753" y="4280427"/>
+          <p:cNvPr id="24" name="S06-mark175"/>
+          <p:cNvSpPr/>
+          <p:nvPr/>
+        </p:nvSpPr>
+        <p:spPr>
+          <a:xfrm>
+            <a:off x="3035410" y="4261239"/>
             <a:ext cx="118872" cy="118872"/>
           </a:xfrm>
           <a:prstGeom prst="ellipse">
@@ -12773,13 +12371,13 @@
       </p:sp>
       <p:sp>
         <p:nvSpPr>
-          <p:cNvPr id="25" name="S06-mark178"/>
-          <p:cNvSpPr/>
-          <p:nvPr/>
-        </p:nvSpPr>
-        <p:spPr>
-          <a:xfrm>
-            <a:off x="3458929" y="3592075"/>
+          <p:cNvPr id="25" name="S06-mark176"/>
+          <p:cNvSpPr/>
+          <p:nvPr/>
+        </p:nvSpPr>
+        <p:spPr>
+          <a:xfrm>
+            <a:off x="3735641" y="3751980"/>
             <a:ext cx="118872" cy="118872"/>
           </a:xfrm>
           <a:prstGeom prst="ellipse">
@@ -12798,13 +12396,13 @@
       </p:sp>
       <p:sp>
         <p:nvSpPr>
-          <p:cNvPr id="26" name="S06-mark179"/>
-          <p:cNvSpPr/>
-          <p:nvPr/>
-        </p:nvSpPr>
-        <p:spPr>
-          <a:xfrm>
-            <a:off x="3803106" y="4108339"/>
+          <p:cNvPr id="26" name="S06-mark177"/>
+          <p:cNvSpPr/>
+          <p:nvPr/>
+        </p:nvSpPr>
+        <p:spPr>
+          <a:xfrm>
+            <a:off x="4435872" y="4133924"/>
             <a:ext cx="118872" cy="118872"/>
           </a:xfrm>
           <a:prstGeom prst="ellipse">
@@ -12823,13 +12421,13 @@
       </p:sp>
       <p:sp>
         <p:nvSpPr>
-          <p:cNvPr id="27" name="S06-label181"/>
+          <p:cNvPr id="27" name="S06-label179"/>
           <p:cNvSpPr txBox="1"/>
           <p:nvPr/>
         </p:nvSpPr>
         <p:spPr>
           <a:xfrm>
-            <a:off x="2312958" y="4681503"/>
+            <a:off x="1531404" y="4527994"/>
             <a:ext cx="294132" cy="349250"/>
           </a:xfrm>
           <a:prstGeom prst="rect">
@@ -12862,13 +12460,13 @@
       </p:sp>
       <p:sp>
         <p:nvSpPr>
-          <p:cNvPr id="28" name="S06-label183"/>
+          <p:cNvPr id="28" name="S06-label181"/>
           <p:cNvSpPr txBox="1"/>
           <p:nvPr/>
         </p:nvSpPr>
         <p:spPr>
           <a:xfrm>
-            <a:off x="2312958" y="4681503"/>
+            <a:off x="1531404" y="4018735"/>
             <a:ext cx="294132" cy="349250"/>
           </a:xfrm>
           <a:prstGeom prst="rect">
@@ -12893,7 +12491,7 @@
                 <a:ea typeface="맑은 고딕" pitchFamily="34" charset="-122"/>
                 <a:cs typeface="맑은 고딕" pitchFamily="34" charset="-120"/>
               </a:rPr>
-              <a:t>0</a:t>
+              <a:t>4</a:t>
             </a:r>
             <a:endParaRPr lang="ko-KR" sz="2200" dirty="0"/>
           </a:p>
@@ -12901,13 +12499,13 @@
       </p:sp>
       <p:sp>
         <p:nvSpPr>
-          <p:cNvPr id="29" name="S06-label185"/>
+          <p:cNvPr id="29" name="S06-label183"/>
           <p:cNvSpPr txBox="1"/>
           <p:nvPr/>
         </p:nvSpPr>
         <p:spPr>
           <a:xfrm>
-            <a:off x="2312958" y="4337326"/>
+            <a:off x="1531404" y="3509476"/>
             <a:ext cx="294132" cy="349250"/>
           </a:xfrm>
           <a:prstGeom prst="rect">
@@ -12932,7 +12530,7 @@
                 <a:ea typeface="맑은 고딕" pitchFamily="34" charset="-122"/>
                 <a:cs typeface="맑은 고딕" pitchFamily="34" charset="-120"/>
               </a:rPr>
-              <a:t>2</a:t>
+              <a:t>8</a:t>
             </a:r>
             <a:endParaRPr lang="ko-KR" sz="2200" dirty="0"/>
           </a:p>
@@ -12940,14 +12538,14 @@
       </p:sp>
       <p:sp>
         <p:nvSpPr>
-          <p:cNvPr id="30" name="S06-label187"/>
+          <p:cNvPr id="30" name="S06-label185"/>
           <p:cNvSpPr txBox="1"/>
           <p:nvPr/>
         </p:nvSpPr>
         <p:spPr>
           <a:xfrm>
-            <a:off x="2312958" y="3993150"/>
-            <a:ext cx="294132" cy="349250"/>
+            <a:off x="1319060" y="3191190"/>
+            <a:ext cx="718820" cy="349250"/>
           </a:xfrm>
           <a:prstGeom prst="rect">
             <a:avLst/>
@@ -12971,7 +12569,7 @@
                 <a:ea typeface="맑은 고딕" pitchFamily="34" charset="-122"/>
                 <a:cs typeface="맑은 고딕" pitchFamily="34" charset="-120"/>
               </a:rPr>
-              <a:t>4</a:t>
+              <a:t>(명)</a:t>
             </a:r>
             <a:endParaRPr lang="ko-KR" sz="2200" dirty="0"/>
           </a:p>
@@ -12979,14 +12577,14 @@
       </p:sp>
       <p:sp>
         <p:nvSpPr>
-          <p:cNvPr id="31" name="S06-label189"/>
+          <p:cNvPr id="31" name="S06-label187"/>
           <p:cNvSpPr txBox="1"/>
           <p:nvPr/>
         </p:nvSpPr>
         <p:spPr>
           <a:xfrm>
-            <a:off x="2312958" y="3648974"/>
-            <a:ext cx="294132" cy="349250"/>
+            <a:off x="2065939" y="4734880"/>
+            <a:ext cx="657352" cy="349250"/>
           </a:xfrm>
           <a:prstGeom prst="rect">
             <a:avLst/>
@@ -13010,7 +12608,7 @@
                 <a:ea typeface="맑은 고딕" pitchFamily="34" charset="-122"/>
                 <a:cs typeface="맑은 고딕" pitchFamily="34" charset="-120"/>
               </a:rPr>
-              <a:t>6</a:t>
+              <a:t>사과</a:t>
             </a:r>
             <a:endParaRPr lang="ko-KR" sz="2200" dirty="0"/>
           </a:p>
@@ -13018,14 +12616,14 @@
       </p:sp>
       <p:sp>
         <p:nvSpPr>
-          <p:cNvPr id="32" name="S06-label191"/>
+          <p:cNvPr id="32" name="S06-label189"/>
           <p:cNvSpPr txBox="1"/>
           <p:nvPr/>
         </p:nvSpPr>
         <p:spPr>
           <a:xfrm>
-            <a:off x="2312958" y="3304798"/>
-            <a:ext cx="294132" cy="349250"/>
+            <a:off x="2903076" y="4734880"/>
+            <a:ext cx="383540" cy="349250"/>
           </a:xfrm>
           <a:prstGeom prst="rect">
             <a:avLst/>
@@ -13049,7 +12647,7 @@
                 <a:ea typeface="맑은 고딕" pitchFamily="34" charset="-122"/>
                 <a:cs typeface="맑은 고딕" pitchFamily="34" charset="-120"/>
               </a:rPr>
-              <a:t>8</a:t>
+              <a:t>배</a:t>
             </a:r>
             <a:endParaRPr lang="ko-KR" sz="2200" dirty="0"/>
           </a:p>
@@ -13057,14 +12655,14 @@
       </p:sp>
       <p:sp>
         <p:nvSpPr>
-          <p:cNvPr id="33" name="S06-label193"/>
+          <p:cNvPr id="33" name="S06-label191"/>
           <p:cNvSpPr txBox="1"/>
           <p:nvPr/>
         </p:nvSpPr>
         <p:spPr>
           <a:xfrm>
-            <a:off x="2100614" y="3132710"/>
-            <a:ext cx="718820" cy="349250"/>
+            <a:off x="3603307" y="4734880"/>
+            <a:ext cx="383540" cy="349250"/>
           </a:xfrm>
           <a:prstGeom prst="rect">
             <a:avLst/>
@@ -13088,7 +12686,7 @@
                 <a:ea typeface="맑은 고딕" pitchFamily="34" charset="-122"/>
                 <a:cs typeface="맑은 고딕" pitchFamily="34" charset="-120"/>
               </a:rPr>
-              <a:t>(명)</a:t>
+              <a:t>귤</a:t>
             </a:r>
             <a:endParaRPr lang="ko-KR" sz="2200" dirty="0"/>
           </a:p>
@@ -13096,13 +12694,13 @@
       </p:sp>
       <p:sp>
         <p:nvSpPr>
-          <p:cNvPr id="34" name="S06-label195"/>
+          <p:cNvPr id="34" name="S06-label193"/>
           <p:cNvSpPr txBox="1"/>
           <p:nvPr/>
         </p:nvSpPr>
         <p:spPr>
           <a:xfrm>
-            <a:off x="2501337" y="4793360"/>
+            <a:off x="4166632" y="4734880"/>
             <a:ext cx="657352" cy="349250"/>
           </a:xfrm>
           <a:prstGeom prst="rect">
@@ -13127,7 +12725,7 @@
                 <a:ea typeface="맑은 고딕" pitchFamily="34" charset="-122"/>
                 <a:cs typeface="맑은 고딕" pitchFamily="34" charset="-120"/>
               </a:rPr>
-              <a:t>사과</a:t>
+              <a:t>포도</a:t>
             </a:r>
             <a:endParaRPr lang="ko-KR" sz="2200" dirty="0"/>
           </a:p>
@@ -13135,124 +12733,7 @@
       </p:sp>
       <p:sp>
         <p:nvSpPr>
-          <p:cNvPr id="35" name="S06-label197"/>
-          <p:cNvSpPr txBox="1"/>
-          <p:nvPr/>
-        </p:nvSpPr>
-        <p:spPr>
-          <a:xfrm>
-            <a:off x="2982419" y="4793360"/>
-            <a:ext cx="383540" cy="349250"/>
-          </a:xfrm>
-          <a:prstGeom prst="rect">
-            <a:avLst/>
-          </a:prstGeom>
-          <a:noFill/>
-          <a:ln/>
-        </p:spPr>
-        <p:txBody>
-          <a:bodyPr wrap="square" lIns="0" tIns="0" rIns="0" bIns="0" rtlCol="0" anchor="ctr"/>
-          <a:lstStyle/>
-          <a:p>
-            <a:pPr eaLnBrk="0" algn="ctr" indent="0" marL="0">
-              <a:buNone/>
-            </a:pPr>
-            <a:r>
-              <a:rPr lang="ko-KR" altLang="en-US" sz="2200" dirty="0">
-                <a:solidFill>
-                  <a:srgbClr val="1F2937"/>
-                </a:solidFill>
-                <a:latin typeface="맑은 고딕" pitchFamily="34" charset="0"/>
-                <a:ea typeface="맑은 고딕" pitchFamily="34" charset="-122"/>
-                <a:cs typeface="맑은 고딕" pitchFamily="34" charset="-120"/>
-              </a:rPr>
-              <a:t>배</a:t>
-            </a:r>
-            <a:endParaRPr lang="ko-KR" sz="2200" dirty="0"/>
-          </a:p>
-        </p:txBody>
-      </p:sp>
-      <p:sp>
-        <p:nvSpPr>
-          <p:cNvPr id="36" name="S06-label199"/>
-          <p:cNvSpPr txBox="1"/>
-          <p:nvPr/>
-        </p:nvSpPr>
-        <p:spPr>
-          <a:xfrm>
-            <a:off x="3326595" y="4793360"/>
-            <a:ext cx="383540" cy="349250"/>
-          </a:xfrm>
-          <a:prstGeom prst="rect">
-            <a:avLst/>
-          </a:prstGeom>
-          <a:noFill/>
-          <a:ln/>
-        </p:spPr>
-        <p:txBody>
-          <a:bodyPr wrap="square" lIns="0" tIns="0" rIns="0" bIns="0" rtlCol="0" anchor="ctr"/>
-          <a:lstStyle/>
-          <a:p>
-            <a:pPr eaLnBrk="0" algn="ctr" indent="0" marL="0">
-              <a:buNone/>
-            </a:pPr>
-            <a:r>
-              <a:rPr lang="ko-KR" altLang="en-US" sz="2200" dirty="0">
-                <a:solidFill>
-                  <a:srgbClr val="1F2937"/>
-                </a:solidFill>
-                <a:latin typeface="맑은 고딕" pitchFamily="34" charset="0"/>
-                <a:ea typeface="맑은 고딕" pitchFamily="34" charset="-122"/>
-                <a:cs typeface="맑은 고딕" pitchFamily="34" charset="-120"/>
-              </a:rPr>
-              <a:t>귤</a:t>
-            </a:r>
-            <a:endParaRPr lang="ko-KR" sz="2200" dirty="0"/>
-          </a:p>
-        </p:txBody>
-      </p:sp>
-      <p:sp>
-        <p:nvSpPr>
-          <p:cNvPr id="37" name="S06-label201"/>
-          <p:cNvSpPr txBox="1"/>
-          <p:nvPr/>
-        </p:nvSpPr>
-        <p:spPr>
-          <a:xfrm>
-            <a:off x="3533866" y="4793360"/>
-            <a:ext cx="657352" cy="349250"/>
-          </a:xfrm>
-          <a:prstGeom prst="rect">
-            <a:avLst/>
-          </a:prstGeom>
-          <a:noFill/>
-          <a:ln/>
-        </p:spPr>
-        <p:txBody>
-          <a:bodyPr wrap="square" lIns="0" tIns="0" rIns="0" bIns="0" rtlCol="0" anchor="ctr"/>
-          <a:lstStyle/>
-          <a:p>
-            <a:pPr eaLnBrk="0" algn="ctr" indent="0" marL="0">
-              <a:buNone/>
-            </a:pPr>
-            <a:r>
-              <a:rPr lang="ko-KR" altLang="en-US" sz="2200" dirty="0">
-                <a:solidFill>
-                  <a:srgbClr val="1F2937"/>
-                </a:solidFill>
-                <a:latin typeface="맑은 고딕" pitchFamily="34" charset="0"/>
-                <a:ea typeface="맑은 고딕" pitchFamily="34" charset="-122"/>
-                <a:cs typeface="맑은 고딕" pitchFamily="34" charset="-120"/>
-              </a:rPr>
-              <a:t>포도</a:t>
-            </a:r>
-            <a:endParaRPr lang="ko-KR" sz="2200" dirty="0"/>
-          </a:p>
-        </p:txBody>
-      </p:sp>
-      <p:sp>
-        <p:nvSpPr>
-          <p:cNvPr id="38" name="S06-chip202"/>
+          <p:cNvPr id="35" name="S06-chip194"/>
           <p:cNvSpPr txBox="1"/>
           <p:nvPr/>
         </p:nvSpPr>
@@ -13299,14 +12780,14 @@
       </p:sp>
       <p:sp>
         <p:nvSpPr>
-          <p:cNvPr id="39" name="S06-figure203" descr="좋아하는 과일별 학생 수 막대그래프: 사과 6, 배 3, 귤 7, 포도 4"/>
-          <p:cNvSpPr/>
-          <p:nvPr/>
-        </p:nvSpPr>
-        <p:spPr>
-          <a:xfrm>
-            <a:off x="8455476" y="3823599"/>
-            <a:ext cx="206506" cy="1032528"/>
+          <p:cNvPr id="36" name="S06-figure195" descr="좋아하는 과일별 학생 수 막대그래프: 사과 6, 배 3, 귤 7, 포도 4"/>
+          <p:cNvSpPr/>
+          <p:nvPr/>
+        </p:nvSpPr>
+        <p:spPr>
+          <a:xfrm>
+            <a:off x="7932359" y="3938731"/>
+            <a:ext cx="381944" cy="763888"/>
           </a:xfrm>
           <a:custGeom>
             <a:avLst/>
@@ -13315,15 +12796,15 @@
             <a:cxnLst/>
             <a:rect l="l" t="t" r="r" b="b"/>
             <a:pathLst>
-              <a:path w="206506" h="1032528">
+              <a:path w="381944" h="763888">
                 <a:moveTo>
-                  <a:pt x="0" y="1032528"/>
+                  <a:pt x="0" y="763888"/>
                 </a:moveTo>
                 <a:lnTo>
-                  <a:pt x="206506" y="1032528"/>
-                </a:lnTo>
-                <a:lnTo>
-                  <a:pt x="206506" y="0"/>
+                  <a:pt x="381944" y="763888"/>
+                </a:lnTo>
+                <a:lnTo>
+                  <a:pt x="381944" y="0"/>
                 </a:lnTo>
                 <a:lnTo>
                   <a:pt x="0" y="0"/>
@@ -13345,14 +12826,14 @@
       </p:sp>
       <p:sp>
         <p:nvSpPr>
-          <p:cNvPr id="40" name="S06-mark204"/>
-          <p:cNvSpPr/>
-          <p:nvPr/>
-        </p:nvSpPr>
-        <p:spPr>
-          <a:xfrm>
-            <a:off x="8799653" y="4339863"/>
-            <a:ext cx="206506" cy="516264"/>
+          <p:cNvPr id="37" name="S06-mark196"/>
+          <p:cNvSpPr/>
+          <p:nvPr/>
+        </p:nvSpPr>
+        <p:spPr>
+          <a:xfrm>
+            <a:off x="8632590" y="4320675"/>
+            <a:ext cx="381944" cy="381944"/>
           </a:xfrm>
           <a:custGeom>
             <a:avLst/>
@@ -13361,15 +12842,15 @@
             <a:cxnLst/>
             <a:rect l="l" t="t" r="r" b="b"/>
             <a:pathLst>
-              <a:path w="206506" h="516264">
+              <a:path w="381944" h="381944">
                 <a:moveTo>
-                  <a:pt x="0" y="516264"/>
+                  <a:pt x="0" y="381944"/>
                 </a:moveTo>
                 <a:lnTo>
-                  <a:pt x="206506" y="516264"/>
-                </a:lnTo>
-                <a:lnTo>
-                  <a:pt x="206506" y="0"/>
+                  <a:pt x="381944" y="381944"/>
+                </a:lnTo>
+                <a:lnTo>
+                  <a:pt x="381944" y="0"/>
                 </a:lnTo>
                 <a:lnTo>
                   <a:pt x="0" y="0"/>
@@ -13391,14 +12872,14 @@
       </p:sp>
       <p:sp>
         <p:nvSpPr>
-          <p:cNvPr id="41" name="S06-mark205"/>
-          <p:cNvSpPr/>
-          <p:nvPr/>
-        </p:nvSpPr>
-        <p:spPr>
-          <a:xfrm>
-            <a:off x="9143829" y="3651511"/>
-            <a:ext cx="206506" cy="1204616"/>
+          <p:cNvPr id="38" name="S06-mark197"/>
+          <p:cNvSpPr/>
+          <p:nvPr/>
+        </p:nvSpPr>
+        <p:spPr>
+          <a:xfrm>
+            <a:off x="9332821" y="3811416"/>
+            <a:ext cx="381944" cy="891203"/>
           </a:xfrm>
           <a:custGeom>
             <a:avLst/>
@@ -13407,15 +12888,15 @@
             <a:cxnLst/>
             <a:rect l="l" t="t" r="r" b="b"/>
             <a:pathLst>
-              <a:path w="206506" h="1204616">
+              <a:path w="381944" h="891203">
                 <a:moveTo>
-                  <a:pt x="0" y="1204616"/>
+                  <a:pt x="0" y="891203"/>
                 </a:moveTo>
                 <a:lnTo>
-                  <a:pt x="206506" y="1204616"/>
-                </a:lnTo>
-                <a:lnTo>
-                  <a:pt x="206506" y="0"/>
+                  <a:pt x="381944" y="891203"/>
+                </a:lnTo>
+                <a:lnTo>
+                  <a:pt x="381944" y="0"/>
                 </a:lnTo>
                 <a:lnTo>
                   <a:pt x="0" y="0"/>
@@ -13437,14 +12918,14 @@
       </p:sp>
       <p:sp>
         <p:nvSpPr>
-          <p:cNvPr id="42" name="S06-mark206"/>
-          <p:cNvSpPr/>
-          <p:nvPr/>
-        </p:nvSpPr>
-        <p:spPr>
-          <a:xfrm>
-            <a:off x="9488005" y="4167775"/>
-            <a:ext cx="206506" cy="688352"/>
+          <p:cNvPr id="39" name="S06-mark198"/>
+          <p:cNvSpPr/>
+          <p:nvPr/>
+        </p:nvSpPr>
+        <p:spPr>
+          <a:xfrm>
+            <a:off x="10033052" y="4193360"/>
+            <a:ext cx="381944" cy="509259"/>
           </a:xfrm>
           <a:custGeom>
             <a:avLst/>
@@ -13453,15 +12934,15 @@
             <a:cxnLst/>
             <a:rect l="l" t="t" r="r" b="b"/>
             <a:pathLst>
-              <a:path w="206506" h="688352">
+              <a:path w="381944" h="509259">
                 <a:moveTo>
-                  <a:pt x="0" y="688352"/>
+                  <a:pt x="0" y="509259"/>
                 </a:moveTo>
                 <a:lnTo>
-                  <a:pt x="206506" y="688352"/>
-                </a:lnTo>
-                <a:lnTo>
-                  <a:pt x="206506" y="0"/>
+                  <a:pt x="381944" y="509259"/>
+                </a:lnTo>
+                <a:lnTo>
+                  <a:pt x="381944" y="0"/>
                 </a:lnTo>
                 <a:lnTo>
                   <a:pt x="0" y="0"/>
@@ -13483,14 +12964,14 @@
       </p:sp>
       <p:sp>
         <p:nvSpPr>
-          <p:cNvPr id="43" name="S06-mark207"/>
-          <p:cNvSpPr/>
-          <p:nvPr/>
-        </p:nvSpPr>
-        <p:spPr>
-          <a:xfrm>
-            <a:off x="8335015" y="4684040"/>
-            <a:ext cx="1479957" cy="0"/>
+          <p:cNvPr id="40" name="S06-mark199"/>
+          <p:cNvSpPr/>
+          <p:nvPr/>
+        </p:nvSpPr>
+        <p:spPr>
+          <a:xfrm>
+            <a:off x="7677730" y="4575304"/>
+            <a:ext cx="2991895" cy="0"/>
           </a:xfrm>
           <a:prstGeom prst="line">
             <a:avLst/>
@@ -13506,14 +12987,14 @@
       </p:sp>
       <p:sp>
         <p:nvSpPr>
-          <p:cNvPr id="44" name="S06-mark208"/>
-          <p:cNvSpPr/>
-          <p:nvPr/>
-        </p:nvSpPr>
-        <p:spPr>
-          <a:xfrm>
-            <a:off x="8335015" y="4511951"/>
-            <a:ext cx="1479957" cy="0"/>
+          <p:cNvPr id="41" name="S06-mark200"/>
+          <p:cNvSpPr/>
+          <p:nvPr/>
+        </p:nvSpPr>
+        <p:spPr>
+          <a:xfrm>
+            <a:off x="7677730" y="4447990"/>
+            <a:ext cx="2991895" cy="0"/>
           </a:xfrm>
           <a:prstGeom prst="line">
             <a:avLst/>
@@ -13529,14 +13010,14 @@
       </p:sp>
       <p:sp>
         <p:nvSpPr>
-          <p:cNvPr id="45" name="S06-mark209"/>
-          <p:cNvSpPr/>
-          <p:nvPr/>
-        </p:nvSpPr>
-        <p:spPr>
-          <a:xfrm>
-            <a:off x="8335015" y="4339863"/>
-            <a:ext cx="1479957" cy="0"/>
+          <p:cNvPr id="42" name="S06-mark201"/>
+          <p:cNvSpPr/>
+          <p:nvPr/>
+        </p:nvSpPr>
+        <p:spPr>
+          <a:xfrm>
+            <a:off x="7677730" y="4320675"/>
+            <a:ext cx="2991895" cy="0"/>
           </a:xfrm>
           <a:prstGeom prst="line">
             <a:avLst/>
@@ -13552,14 +13033,14 @@
       </p:sp>
       <p:sp>
         <p:nvSpPr>
-          <p:cNvPr id="46" name="S06-mark210"/>
-          <p:cNvSpPr/>
-          <p:nvPr/>
-        </p:nvSpPr>
-        <p:spPr>
-          <a:xfrm>
-            <a:off x="8335015" y="4167775"/>
-            <a:ext cx="1479957" cy="0"/>
+          <p:cNvPr id="43" name="S06-mark202"/>
+          <p:cNvSpPr/>
+          <p:nvPr/>
+        </p:nvSpPr>
+        <p:spPr>
+          <a:xfrm>
+            <a:off x="7677730" y="4193360"/>
+            <a:ext cx="2991895" cy="0"/>
           </a:xfrm>
           <a:prstGeom prst="line">
             <a:avLst/>
@@ -13575,14 +13056,14 @@
       </p:sp>
       <p:sp>
         <p:nvSpPr>
-          <p:cNvPr id="47" name="S06-mark211"/>
-          <p:cNvSpPr/>
-          <p:nvPr/>
-        </p:nvSpPr>
-        <p:spPr>
-          <a:xfrm>
-            <a:off x="8335015" y="3995687"/>
-            <a:ext cx="1479957" cy="0"/>
+          <p:cNvPr id="44" name="S06-mark203"/>
+          <p:cNvSpPr/>
+          <p:nvPr/>
+        </p:nvSpPr>
+        <p:spPr>
+          <a:xfrm>
+            <a:off x="7677730" y="4066045"/>
+            <a:ext cx="2991895" cy="0"/>
           </a:xfrm>
           <a:prstGeom prst="line">
             <a:avLst/>
@@ -13598,14 +13079,14 @@
       </p:sp>
       <p:sp>
         <p:nvSpPr>
-          <p:cNvPr id="48" name="S06-mark212"/>
-          <p:cNvSpPr/>
-          <p:nvPr/>
-        </p:nvSpPr>
-        <p:spPr>
-          <a:xfrm>
-            <a:off x="8335015" y="3823599"/>
-            <a:ext cx="1479957" cy="0"/>
+          <p:cNvPr id="45" name="S06-mark204"/>
+          <p:cNvSpPr/>
+          <p:nvPr/>
+        </p:nvSpPr>
+        <p:spPr>
+          <a:xfrm>
+            <a:off x="7677730" y="3938731"/>
+            <a:ext cx="2991895" cy="0"/>
           </a:xfrm>
           <a:prstGeom prst="line">
             <a:avLst/>
@@ -13621,14 +13102,14 @@
       </p:sp>
       <p:sp>
         <p:nvSpPr>
-          <p:cNvPr id="49" name="S06-mark213"/>
-          <p:cNvSpPr/>
-          <p:nvPr/>
-        </p:nvSpPr>
-        <p:spPr>
-          <a:xfrm>
-            <a:off x="8335015" y="3651511"/>
-            <a:ext cx="1479957" cy="0"/>
+          <p:cNvPr id="46" name="S06-mark205"/>
+          <p:cNvSpPr/>
+          <p:nvPr/>
+        </p:nvSpPr>
+        <p:spPr>
+          <a:xfrm>
+            <a:off x="7677730" y="3811416"/>
+            <a:ext cx="2991895" cy="0"/>
           </a:xfrm>
           <a:prstGeom prst="line">
             <a:avLst/>
@@ -13644,14 +13125,14 @@
       </p:sp>
       <p:sp>
         <p:nvSpPr>
-          <p:cNvPr id="50" name="S06-mark214"/>
-          <p:cNvSpPr/>
-          <p:nvPr/>
-        </p:nvSpPr>
-        <p:spPr>
-          <a:xfrm>
-            <a:off x="8335015" y="3479423"/>
-            <a:ext cx="1479957" cy="0"/>
+          <p:cNvPr id="47" name="S06-mark206"/>
+          <p:cNvSpPr/>
+          <p:nvPr/>
+        </p:nvSpPr>
+        <p:spPr>
+          <a:xfrm>
+            <a:off x="7677730" y="3684101"/>
+            <a:ext cx="2991895" cy="0"/>
           </a:xfrm>
           <a:prstGeom prst="line">
             <a:avLst/>
@@ -13667,14 +13148,14 @@
       </p:sp>
       <p:sp>
         <p:nvSpPr>
-          <p:cNvPr id="51" name="S06-mark215"/>
-          <p:cNvSpPr/>
-          <p:nvPr/>
-        </p:nvSpPr>
-        <p:spPr>
-          <a:xfrm>
-            <a:off x="8335015" y="4856128"/>
-            <a:ext cx="1479957" cy="0"/>
+          <p:cNvPr id="48" name="S06-mark207"/>
+          <p:cNvSpPr/>
+          <p:nvPr/>
+        </p:nvSpPr>
+        <p:spPr>
+          <a:xfrm>
+            <a:off x="7677730" y="4702619"/>
+            <a:ext cx="2991895" cy="0"/>
           </a:xfrm>
           <a:prstGeom prst="line">
             <a:avLst/>
@@ -13690,14 +13171,14 @@
       </p:sp>
       <p:sp>
         <p:nvSpPr>
-          <p:cNvPr id="52" name="S06-mark216"/>
+          <p:cNvPr id="49" name="S06-mark208"/>
           <p:cNvSpPr/>
           <p:nvPr/>
         </p:nvSpPr>
         <p:spPr>
           <a:xfrm flipV="1">
-            <a:off x="8335015" y="3410588"/>
-            <a:ext cx="0" cy="1445540"/>
+            <a:off x="7677730" y="3556787"/>
+            <a:ext cx="0" cy="1145832"/>
           </a:xfrm>
           <a:prstGeom prst="line">
             <a:avLst/>
@@ -13713,13 +13194,13 @@
       </p:sp>
       <p:sp>
         <p:nvSpPr>
-          <p:cNvPr id="53" name="S06-label218"/>
+          <p:cNvPr id="50" name="S06-label210"/>
           <p:cNvSpPr txBox="1"/>
           <p:nvPr/>
         </p:nvSpPr>
         <p:spPr>
           <a:xfrm>
-            <a:off x="8041674" y="4681503"/>
+            <a:off x="7260120" y="4527994"/>
             <a:ext cx="294132" cy="349250"/>
           </a:xfrm>
           <a:prstGeom prst="rect">
@@ -13752,13 +13233,13 @@
       </p:sp>
       <p:sp>
         <p:nvSpPr>
-          <p:cNvPr id="54" name="S06-label220"/>
+          <p:cNvPr id="51" name="S06-label212"/>
           <p:cNvSpPr txBox="1"/>
           <p:nvPr/>
         </p:nvSpPr>
         <p:spPr>
           <a:xfrm>
-            <a:off x="8041674" y="4337326"/>
+            <a:off x="7260120" y="4018735"/>
             <a:ext cx="294132" cy="349250"/>
           </a:xfrm>
           <a:prstGeom prst="rect">
@@ -13783,7 +13264,7 @@
                 <a:ea typeface="맑은 고딕" pitchFamily="34" charset="-122"/>
                 <a:cs typeface="맑은 고딕" pitchFamily="34" charset="-120"/>
               </a:rPr>
-              <a:t>2</a:t>
+              <a:t>4</a:t>
             </a:r>
             <a:endParaRPr lang="ko-KR" sz="2200" dirty="0"/>
           </a:p>
@@ -13791,13 +13272,13 @@
       </p:sp>
       <p:sp>
         <p:nvSpPr>
-          <p:cNvPr id="55" name="S06-label222"/>
+          <p:cNvPr id="52" name="S06-label214"/>
           <p:cNvSpPr txBox="1"/>
           <p:nvPr/>
         </p:nvSpPr>
         <p:spPr>
           <a:xfrm>
-            <a:off x="8041674" y="3993150"/>
+            <a:off x="7260120" y="3509476"/>
             <a:ext cx="294132" cy="349250"/>
           </a:xfrm>
           <a:prstGeom prst="rect">
@@ -13822,7 +13303,7 @@
                 <a:ea typeface="맑은 고딕" pitchFamily="34" charset="-122"/>
                 <a:cs typeface="맑은 고딕" pitchFamily="34" charset="-120"/>
               </a:rPr>
-              <a:t>4</a:t>
+              <a:t>8</a:t>
             </a:r>
             <a:endParaRPr lang="ko-KR" sz="2200" dirty="0"/>
           </a:p>
@@ -13830,14 +13311,14 @@
       </p:sp>
       <p:sp>
         <p:nvSpPr>
-          <p:cNvPr id="56" name="S06-label224"/>
+          <p:cNvPr id="53" name="S06-label216"/>
           <p:cNvSpPr txBox="1"/>
           <p:nvPr/>
         </p:nvSpPr>
         <p:spPr>
           <a:xfrm>
-            <a:off x="8041674" y="3648974"/>
-            <a:ext cx="294132" cy="349250"/>
+            <a:off x="7047776" y="3191190"/>
+            <a:ext cx="718820" cy="349250"/>
           </a:xfrm>
           <a:prstGeom prst="rect">
             <a:avLst/>
@@ -13861,7 +13342,7 @@
                 <a:ea typeface="맑은 고딕" pitchFamily="34" charset="-122"/>
                 <a:cs typeface="맑은 고딕" pitchFamily="34" charset="-120"/>
               </a:rPr>
-              <a:t>6</a:t>
+              <a:t>(명)</a:t>
             </a:r>
             <a:endParaRPr lang="ko-KR" sz="2200" dirty="0"/>
           </a:p>
@@ -13869,14 +13350,14 @@
       </p:sp>
       <p:sp>
         <p:nvSpPr>
-          <p:cNvPr id="57" name="S06-label226"/>
+          <p:cNvPr id="54" name="S06-label218"/>
           <p:cNvSpPr txBox="1"/>
           <p:nvPr/>
         </p:nvSpPr>
         <p:spPr>
           <a:xfrm>
-            <a:off x="8041674" y="3304798"/>
-            <a:ext cx="294132" cy="349250"/>
+            <a:off x="7794655" y="4734880"/>
+            <a:ext cx="657352" cy="349250"/>
           </a:xfrm>
           <a:prstGeom prst="rect">
             <a:avLst/>
@@ -13900,7 +13381,7 @@
                 <a:ea typeface="맑은 고딕" pitchFamily="34" charset="-122"/>
                 <a:cs typeface="맑은 고딕" pitchFamily="34" charset="-120"/>
               </a:rPr>
-              <a:t>8</a:t>
+              <a:t>사과</a:t>
             </a:r>
             <a:endParaRPr lang="ko-KR" sz="2200" dirty="0"/>
           </a:p>
@@ -13908,14 +13389,14 @@
       </p:sp>
       <p:sp>
         <p:nvSpPr>
-          <p:cNvPr id="58" name="S06-label228"/>
+          <p:cNvPr id="55" name="S06-label220"/>
           <p:cNvSpPr txBox="1"/>
           <p:nvPr/>
         </p:nvSpPr>
         <p:spPr>
           <a:xfrm>
-            <a:off x="7829330" y="3132710"/>
-            <a:ext cx="718820" cy="349250"/>
+            <a:off x="8631792" y="4734880"/>
+            <a:ext cx="383540" cy="349250"/>
           </a:xfrm>
           <a:prstGeom prst="rect">
             <a:avLst/>
@@ -13939,7 +13420,7 @@
                 <a:ea typeface="맑은 고딕" pitchFamily="34" charset="-122"/>
                 <a:cs typeface="맑은 고딕" pitchFamily="34" charset="-120"/>
               </a:rPr>
-              <a:t>(명)</a:t>
+              <a:t>배</a:t>
             </a:r>
             <a:endParaRPr lang="ko-KR" sz="2200" dirty="0"/>
           </a:p>
@@ -13947,14 +13428,14 @@
       </p:sp>
       <p:sp>
         <p:nvSpPr>
-          <p:cNvPr id="59" name="S06-label230"/>
+          <p:cNvPr id="56" name="S06-label222"/>
           <p:cNvSpPr txBox="1"/>
           <p:nvPr/>
         </p:nvSpPr>
         <p:spPr>
           <a:xfrm>
-            <a:off x="8230053" y="4793360"/>
-            <a:ext cx="657352" cy="349250"/>
+            <a:off x="9332023" y="4734880"/>
+            <a:ext cx="383540" cy="349250"/>
           </a:xfrm>
           <a:prstGeom prst="rect">
             <a:avLst/>
@@ -13978,7 +13459,7 @@
                 <a:ea typeface="맑은 고딕" pitchFamily="34" charset="-122"/>
                 <a:cs typeface="맑은 고딕" pitchFamily="34" charset="-120"/>
               </a:rPr>
-              <a:t>사과</a:t>
+              <a:t>귤</a:t>
             </a:r>
             <a:endParaRPr lang="ko-KR" sz="2200" dirty="0"/>
           </a:p>
@@ -13986,91 +13467,13 @@
       </p:sp>
       <p:sp>
         <p:nvSpPr>
-          <p:cNvPr id="60" name="S06-label232"/>
+          <p:cNvPr id="57" name="S06-label224"/>
           <p:cNvSpPr txBox="1"/>
           <p:nvPr/>
         </p:nvSpPr>
         <p:spPr>
           <a:xfrm>
-            <a:off x="8711135" y="4793360"/>
-            <a:ext cx="383540" cy="349250"/>
-          </a:xfrm>
-          <a:prstGeom prst="rect">
-            <a:avLst/>
-          </a:prstGeom>
-          <a:noFill/>
-          <a:ln/>
-        </p:spPr>
-        <p:txBody>
-          <a:bodyPr wrap="square" lIns="0" tIns="0" rIns="0" bIns="0" rtlCol="0" anchor="ctr"/>
-          <a:lstStyle/>
-          <a:p>
-            <a:pPr eaLnBrk="0" algn="ctr" indent="0" marL="0">
-              <a:buNone/>
-            </a:pPr>
-            <a:r>
-              <a:rPr lang="ko-KR" altLang="en-US" sz="2200" dirty="0">
-                <a:solidFill>
-                  <a:srgbClr val="1F2937"/>
-                </a:solidFill>
-                <a:latin typeface="맑은 고딕" pitchFamily="34" charset="0"/>
-                <a:ea typeface="맑은 고딕" pitchFamily="34" charset="-122"/>
-                <a:cs typeface="맑은 고딕" pitchFamily="34" charset="-120"/>
-              </a:rPr>
-              <a:t>배</a:t>
-            </a:r>
-            <a:endParaRPr lang="ko-KR" sz="2200" dirty="0"/>
-          </a:p>
-        </p:txBody>
-      </p:sp>
-      <p:sp>
-        <p:nvSpPr>
-          <p:cNvPr id="61" name="S06-label234"/>
-          <p:cNvSpPr txBox="1"/>
-          <p:nvPr/>
-        </p:nvSpPr>
-        <p:spPr>
-          <a:xfrm>
-            <a:off x="9055311" y="4793360"/>
-            <a:ext cx="383540" cy="349250"/>
-          </a:xfrm>
-          <a:prstGeom prst="rect">
-            <a:avLst/>
-          </a:prstGeom>
-          <a:noFill/>
-          <a:ln/>
-        </p:spPr>
-        <p:txBody>
-          <a:bodyPr wrap="square" lIns="0" tIns="0" rIns="0" bIns="0" rtlCol="0" anchor="ctr"/>
-          <a:lstStyle/>
-          <a:p>
-            <a:pPr eaLnBrk="0" algn="ctr" indent="0" marL="0">
-              <a:buNone/>
-            </a:pPr>
-            <a:r>
-              <a:rPr lang="ko-KR" altLang="en-US" sz="2200" dirty="0">
-                <a:solidFill>
-                  <a:srgbClr val="1F2937"/>
-                </a:solidFill>
-                <a:latin typeface="맑은 고딕" pitchFamily="34" charset="0"/>
-                <a:ea typeface="맑은 고딕" pitchFamily="34" charset="-122"/>
-                <a:cs typeface="맑은 고딕" pitchFamily="34" charset="-120"/>
-              </a:rPr>
-              <a:t>귤</a:t>
-            </a:r>
-            <a:endParaRPr lang="ko-KR" sz="2200" dirty="0"/>
-          </a:p>
-        </p:txBody>
-      </p:sp>
-      <p:sp>
-        <p:nvSpPr>
-          <p:cNvPr id="62" name="S06-label236"/>
-          <p:cNvSpPr txBox="1"/>
-          <p:nvPr/>
-        </p:nvSpPr>
-        <p:spPr>
-          <a:xfrm>
-            <a:off x="9262582" y="4793360"/>
+            <a:off x="9895348" y="4734880"/>
             <a:ext cx="657352" cy="349250"/>
           </a:xfrm>
           <a:prstGeom prst="rect">
@@ -14217,7 +13620,7 @@
       </p:sp>
       <p:sp>
         <p:nvSpPr>
-          <p:cNvPr id="3" name="S07-text237"/>
+          <p:cNvPr id="3" name="S07-text225"/>
           <p:cNvSpPr txBox="1"/>
           <p:nvPr/>
         </p:nvSpPr>
@@ -14256,7 +13659,7 @@
       </p:sp>
       <p:sp>
         <p:nvSpPr>
-          <p:cNvPr id="4" name="S07-figure238" descr="원그래프 ‘도서관 책의 종류’(400권): 문학 40 %, 과학 25 %, 역사 20 %, 기타 15 %"/>
+          <p:cNvPr id="4" name="S07-figure226" descr="원그래프 ‘도서관 책의 종류’(400권): 문학 40 %, 과학 25 %, 역사 20 %, 기타 15 %"/>
           <p:cNvSpPr/>
           <p:nvPr/>
         </p:nvSpPr>
@@ -14440,7 +13843,7 @@
       </p:sp>
       <p:sp>
         <p:nvSpPr>
-          <p:cNvPr id="5" name="S07-mark239"/>
+          <p:cNvPr id="5" name="S07-mark227"/>
           <p:cNvSpPr/>
           <p:nvPr/>
         </p:nvSpPr>
@@ -14570,7 +13973,7 @@
       </p:sp>
       <p:sp>
         <p:nvSpPr>
-          <p:cNvPr id="6" name="S07-mark240"/>
+          <p:cNvPr id="6" name="S07-mark228"/>
           <p:cNvSpPr/>
           <p:nvPr/>
         </p:nvSpPr>
@@ -14682,7 +14085,7 @@
       </p:sp>
       <p:sp>
         <p:nvSpPr>
-          <p:cNvPr id="7" name="S07-mark241"/>
+          <p:cNvPr id="7" name="S07-mark229"/>
           <p:cNvSpPr/>
           <p:nvPr/>
         </p:nvSpPr>
@@ -14776,7 +14179,7 @@
       </p:sp>
       <p:sp>
         <p:nvSpPr>
-          <p:cNvPr id="8" name="S07-mark242"/>
+          <p:cNvPr id="8" name="S07-mark230"/>
           <p:cNvSpPr/>
           <p:nvPr/>
         </p:nvSpPr>
@@ -14799,7 +14202,7 @@
       </p:sp>
       <p:sp>
         <p:nvSpPr>
-          <p:cNvPr id="9" name="S07-mark243"/>
+          <p:cNvPr id="9" name="S07-mark231"/>
           <p:cNvSpPr/>
           <p:nvPr/>
         </p:nvSpPr>
@@ -14822,7 +14225,7 @@
       </p:sp>
       <p:sp>
         <p:nvSpPr>
-          <p:cNvPr id="10" name="S07-mark244"/>
+          <p:cNvPr id="10" name="S07-mark232"/>
           <p:cNvSpPr/>
           <p:nvPr/>
         </p:nvSpPr>
@@ -14845,7 +14248,7 @@
       </p:sp>
       <p:sp>
         <p:nvSpPr>
-          <p:cNvPr id="11" name="S07-mark245"/>
+          <p:cNvPr id="11" name="S07-mark233"/>
           <p:cNvSpPr/>
           <p:nvPr/>
         </p:nvSpPr>
@@ -14868,7 +14271,7 @@
       </p:sp>
       <p:sp>
         <p:nvSpPr>
-          <p:cNvPr id="12" name="S07-mark246"/>
+          <p:cNvPr id="12" name="S07-mark234"/>
           <p:cNvSpPr/>
           <p:nvPr/>
         </p:nvSpPr>
@@ -14891,7 +14294,7 @@
       </p:sp>
       <p:sp>
         <p:nvSpPr>
-          <p:cNvPr id="13" name="S07-mark247"/>
+          <p:cNvPr id="13" name="S07-mark235"/>
           <p:cNvSpPr/>
           <p:nvPr/>
         </p:nvSpPr>
@@ -14914,7 +14317,7 @@
       </p:sp>
       <p:sp>
         <p:nvSpPr>
-          <p:cNvPr id="14" name="S07-mark248"/>
+          <p:cNvPr id="14" name="S07-mark236"/>
           <p:cNvSpPr/>
           <p:nvPr/>
         </p:nvSpPr>
@@ -14937,7 +14340,7 @@
       </p:sp>
       <p:sp>
         <p:nvSpPr>
-          <p:cNvPr id="15" name="S07-mark249"/>
+          <p:cNvPr id="15" name="S07-mark237"/>
           <p:cNvSpPr/>
           <p:nvPr/>
         </p:nvSpPr>
@@ -14960,7 +14363,7 @@
       </p:sp>
       <p:sp>
         <p:nvSpPr>
-          <p:cNvPr id="16" name="S07-mark250"/>
+          <p:cNvPr id="16" name="S07-mark238"/>
           <p:cNvSpPr/>
           <p:nvPr/>
         </p:nvSpPr>
@@ -14983,7 +14386,7 @@
       </p:sp>
       <p:sp>
         <p:nvSpPr>
-          <p:cNvPr id="17" name="S07-mark251"/>
+          <p:cNvPr id="17" name="S07-mark239"/>
           <p:cNvSpPr/>
           <p:nvPr/>
         </p:nvSpPr>
@@ -15006,7 +14409,7 @@
       </p:sp>
       <p:sp>
         <p:nvSpPr>
-          <p:cNvPr id="18" name="S07-mark252"/>
+          <p:cNvPr id="18" name="S07-mark240"/>
           <p:cNvSpPr/>
           <p:nvPr/>
         </p:nvSpPr>
@@ -15029,7 +14432,7 @@
       </p:sp>
       <p:sp>
         <p:nvSpPr>
-          <p:cNvPr id="19" name="S07-mark253"/>
+          <p:cNvPr id="19" name="S07-mark241"/>
           <p:cNvSpPr/>
           <p:nvPr/>
         </p:nvSpPr>
@@ -15052,7 +14455,7 @@
       </p:sp>
       <p:sp>
         <p:nvSpPr>
-          <p:cNvPr id="20" name="S07-mark254"/>
+          <p:cNvPr id="20" name="S07-mark242"/>
           <p:cNvSpPr/>
           <p:nvPr/>
         </p:nvSpPr>
@@ -15075,7 +14478,7 @@
       </p:sp>
       <p:sp>
         <p:nvSpPr>
-          <p:cNvPr id="21" name="S07-mark255"/>
+          <p:cNvPr id="21" name="S07-mark243"/>
           <p:cNvSpPr/>
           <p:nvPr/>
         </p:nvSpPr>
@@ -15098,7 +14501,7 @@
       </p:sp>
       <p:sp>
         <p:nvSpPr>
-          <p:cNvPr id="22" name="S07-mark256"/>
+          <p:cNvPr id="22" name="S07-mark244"/>
           <p:cNvSpPr/>
           <p:nvPr/>
         </p:nvSpPr>
@@ -15121,7 +14524,7 @@
       </p:sp>
       <p:sp>
         <p:nvSpPr>
-          <p:cNvPr id="23" name="S07-mark257"/>
+          <p:cNvPr id="23" name="S07-mark245"/>
           <p:cNvSpPr/>
           <p:nvPr/>
         </p:nvSpPr>
@@ -15144,7 +14547,7 @@
       </p:sp>
       <p:sp>
         <p:nvSpPr>
-          <p:cNvPr id="24" name="S07-mark258"/>
+          <p:cNvPr id="24" name="S07-mark246"/>
           <p:cNvSpPr/>
           <p:nvPr/>
         </p:nvSpPr>
@@ -15167,7 +14570,7 @@
       </p:sp>
       <p:sp>
         <p:nvSpPr>
-          <p:cNvPr id="25" name="S07-mark259"/>
+          <p:cNvPr id="25" name="S07-mark247"/>
           <p:cNvSpPr/>
           <p:nvPr/>
         </p:nvSpPr>
@@ -15190,7 +14593,7 @@
       </p:sp>
       <p:sp>
         <p:nvSpPr>
-          <p:cNvPr id="26" name="S07-mark260"/>
+          <p:cNvPr id="26" name="S07-mark248"/>
           <p:cNvSpPr/>
           <p:nvPr/>
         </p:nvSpPr>
@@ -15213,7 +14616,7 @@
       </p:sp>
       <p:sp>
         <p:nvSpPr>
-          <p:cNvPr id="27" name="S07-mark261"/>
+          <p:cNvPr id="27" name="S07-mark249"/>
           <p:cNvSpPr/>
           <p:nvPr/>
         </p:nvSpPr>
@@ -15236,7 +14639,7 @@
       </p:sp>
       <p:sp>
         <p:nvSpPr>
-          <p:cNvPr id="28" name="S07-label263"/>
+          <p:cNvPr id="28" name="S07-label251"/>
           <p:cNvSpPr txBox="1"/>
           <p:nvPr/>
         </p:nvSpPr>
@@ -15292,7 +14695,7 @@
       </p:sp>
       <p:sp>
         <p:nvSpPr>
-          <p:cNvPr id="29" name="S07-label265"/>
+          <p:cNvPr id="29" name="S07-label253"/>
           <p:cNvSpPr txBox="1"/>
           <p:nvPr/>
         </p:nvSpPr>
@@ -15348,7 +14751,7 @@
       </p:sp>
       <p:sp>
         <p:nvSpPr>
-          <p:cNvPr id="30" name="S07-label267"/>
+          <p:cNvPr id="30" name="S07-label255"/>
           <p:cNvSpPr txBox="1"/>
           <p:nvPr/>
         </p:nvSpPr>
@@ -15404,7 +14807,7 @@
       </p:sp>
       <p:sp>
         <p:nvSpPr>
-          <p:cNvPr id="31" name="S07-label269"/>
+          <p:cNvPr id="31" name="S07-label257"/>
           <p:cNvSpPr txBox="1"/>
           <p:nvPr/>
         </p:nvSpPr>
@@ -15460,7 +14863,7 @@
       </p:sp>
       <p:sp>
         <p:nvSpPr>
-          <p:cNvPr id="32" name="S07-label271"/>
+          <p:cNvPr id="32" name="S07-label259"/>
           <p:cNvSpPr txBox="1"/>
           <p:nvPr/>
         </p:nvSpPr>
@@ -15499,7 +14902,7 @@
       </p:sp>
       <p:sp>
         <p:nvSpPr>
-          <p:cNvPr id="33" name="S07-stepno272"/>
+          <p:cNvPr id="33" name="S07-stepno260"/>
           <p:cNvSpPr txBox="1"/>
           <p:nvPr/>
         </p:nvSpPr>
@@ -15544,7 +14947,7 @@
       </p:sp>
       <p:sp>
         <p:nvSpPr>
-          <p:cNvPr id="34" name="S07-text273"/>
+          <p:cNvPr id="34" name="S07-text261"/>
           <p:cNvSpPr txBox="1"/>
           <p:nvPr/>
         </p:nvSpPr>
@@ -15600,7 +15003,7 @@
       </p:sp>
       <p:sp>
         <p:nvSpPr>
-          <p:cNvPr id="35" name="S07-stepno274"/>
+          <p:cNvPr id="35" name="S07-stepno262"/>
           <p:cNvSpPr txBox="1"/>
           <p:nvPr/>
         </p:nvSpPr>
@@ -15645,7 +15048,7 @@
       </p:sp>
       <p:sp>
         <p:nvSpPr>
-          <p:cNvPr id="36" name="S07-text275"/>
+          <p:cNvPr id="36" name="S07-text263"/>
           <p:cNvSpPr txBox="1"/>
           <p:nvPr/>
         </p:nvSpPr>
@@ -15701,7 +15104,7 @@
       </p:sp>
       <p:sp>
         <p:nvSpPr>
-          <p:cNvPr id="37" name="S07-stepno276"/>
+          <p:cNvPr id="37" name="S07-stepno264"/>
           <p:cNvSpPr txBox="1"/>
           <p:nvPr/>
         </p:nvSpPr>
@@ -15746,7 +15149,7 @@
       </p:sp>
       <p:sp>
         <p:nvSpPr>
-          <p:cNvPr id="38" name="S07-text277"/>
+          <p:cNvPr id="38" name="S07-text265"/>
           <p:cNvSpPr txBox="1"/>
           <p:nvPr/>
         </p:nvSpPr>
@@ -15802,7 +15205,7 @@
       </p:sp>
       <p:sp>
         <p:nvSpPr>
-          <p:cNvPr id="39" name="S07-stepno278"/>
+          <p:cNvPr id="39" name="S07-stepno266"/>
           <p:cNvSpPr txBox="1"/>
           <p:nvPr/>
         </p:nvSpPr>
@@ -15847,7 +15250,7 @@
       </p:sp>
       <p:sp>
         <p:nvSpPr>
-          <p:cNvPr id="40" name="S07-text279"/>
+          <p:cNvPr id="40" name="S07-text267"/>
           <p:cNvSpPr txBox="1"/>
           <p:nvPr/>
         </p:nvSpPr>
@@ -16017,7 +15420,7 @@
       </p:sp>
       <p:sp>
         <p:nvSpPr>
-          <p:cNvPr id="3" name="S08-text280"/>
+          <p:cNvPr id="3" name="S08-text268"/>
           <p:cNvSpPr txBox="1"/>
           <p:nvPr/>
         </p:nvSpPr>
@@ -16056,7 +15459,7 @@
       </p:sp>
       <p:sp>
         <p:nvSpPr>
-          <p:cNvPr id="4" name="S08-figure281" descr="꺾은선그래프 ‘월별 도서관 이용자 수’(세로 눈금 한 칸 20명, 물결선 위 100부터): 3월 120, 4월 140, 5월 120, 6월 180, 7월 200"/>
+          <p:cNvPr id="4" name="S08-figure269" descr="꺾은선그래프 ‘월별 도서관 이용자 수’(세로 눈금 한 칸 20명, 물결선 위 100부터): 3월 120, 4월 140, 5월 120, 6월 180, 7월 200"/>
           <p:cNvSpPr/>
           <p:nvPr/>
         </p:nvSpPr>
@@ -16108,7 +15511,7 @@
       </p:sp>
       <p:sp>
         <p:nvSpPr>
-          <p:cNvPr id="5" name="S08-mark282"/>
+          <p:cNvPr id="5" name="S08-mark270"/>
           <p:cNvSpPr/>
           <p:nvPr/>
         </p:nvSpPr>
@@ -16154,7 +15557,7 @@
       </p:sp>
       <p:sp>
         <p:nvSpPr>
-          <p:cNvPr id="6" name="S08-mark283"/>
+          <p:cNvPr id="6" name="S08-mark271"/>
           <p:cNvSpPr/>
           <p:nvPr/>
         </p:nvSpPr>
@@ -16177,7 +15580,7 @@
       </p:sp>
       <p:sp>
         <p:nvSpPr>
-          <p:cNvPr id="7" name="S08-mark284"/>
+          <p:cNvPr id="7" name="S08-mark272"/>
           <p:cNvSpPr/>
           <p:nvPr/>
         </p:nvSpPr>
@@ -16200,7 +15603,7 @@
       </p:sp>
       <p:sp>
         <p:nvSpPr>
-          <p:cNvPr id="8" name="S08-mark285"/>
+          <p:cNvPr id="8" name="S08-mark273"/>
           <p:cNvSpPr/>
           <p:nvPr/>
         </p:nvSpPr>
@@ -16223,7 +15626,7 @@
       </p:sp>
       <p:sp>
         <p:nvSpPr>
-          <p:cNvPr id="9" name="S08-mark286"/>
+          <p:cNvPr id="9" name="S08-mark274"/>
           <p:cNvSpPr/>
           <p:nvPr/>
         </p:nvSpPr>
@@ -16246,7 +15649,7 @@
       </p:sp>
       <p:sp>
         <p:nvSpPr>
-          <p:cNvPr id="10" name="S08-mark287"/>
+          <p:cNvPr id="10" name="S08-mark275"/>
           <p:cNvSpPr/>
           <p:nvPr/>
         </p:nvSpPr>
@@ -16269,7 +15672,7 @@
       </p:sp>
       <p:sp>
         <p:nvSpPr>
-          <p:cNvPr id="11" name="S08-mark288"/>
+          <p:cNvPr id="11" name="S08-mark276"/>
           <p:cNvSpPr/>
           <p:nvPr/>
         </p:nvSpPr>
@@ -16292,7 +15695,7 @@
       </p:sp>
       <p:sp>
         <p:nvSpPr>
-          <p:cNvPr id="12" name="S08-mark289"/>
+          <p:cNvPr id="12" name="S08-mark277"/>
           <p:cNvSpPr/>
           <p:nvPr/>
         </p:nvSpPr>
@@ -16315,7 +15718,7 @@
       </p:sp>
       <p:sp>
         <p:nvSpPr>
-          <p:cNvPr id="13" name="S08-mark290"/>
+          <p:cNvPr id="13" name="S08-mark278"/>
           <p:cNvSpPr/>
           <p:nvPr/>
         </p:nvSpPr>
@@ -16338,7 +15741,7 @@
       </p:sp>
       <p:sp>
         <p:nvSpPr>
-          <p:cNvPr id="14" name="S08-mark291"/>
+          <p:cNvPr id="14" name="S08-mark279"/>
           <p:cNvSpPr/>
           <p:nvPr/>
         </p:nvSpPr>
@@ -16361,7 +15764,7 @@
       </p:sp>
       <p:sp>
         <p:nvSpPr>
-          <p:cNvPr id="15" name="S08-mark292"/>
+          <p:cNvPr id="15" name="S08-mark280"/>
           <p:cNvSpPr/>
           <p:nvPr/>
         </p:nvSpPr>
@@ -16384,7 +15787,7 @@
       </p:sp>
       <p:sp>
         <p:nvSpPr>
-          <p:cNvPr id="16" name="S08-mark293"/>
+          <p:cNvPr id="16" name="S08-mark281"/>
           <p:cNvSpPr/>
           <p:nvPr/>
         </p:nvSpPr>
@@ -16407,7 +15810,7 @@
       </p:sp>
       <p:sp>
         <p:nvSpPr>
-          <p:cNvPr id="17" name="S08-mark294"/>
+          <p:cNvPr id="17" name="S08-mark282"/>
           <p:cNvSpPr/>
           <p:nvPr/>
         </p:nvSpPr>
@@ -16430,7 +15833,7 @@
       </p:sp>
       <p:sp>
         <p:nvSpPr>
-          <p:cNvPr id="18" name="S08-mark295"/>
+          <p:cNvPr id="18" name="S08-mark283"/>
           <p:cNvSpPr/>
           <p:nvPr/>
         </p:nvSpPr>
@@ -16453,7 +15856,7 @@
       </p:sp>
       <p:sp>
         <p:nvSpPr>
-          <p:cNvPr id="19" name="S08-mark296"/>
+          <p:cNvPr id="19" name="S08-mark284"/>
           <p:cNvSpPr/>
           <p:nvPr/>
         </p:nvSpPr>
@@ -16478,7 +15881,7 @@
       </p:sp>
       <p:sp>
         <p:nvSpPr>
-          <p:cNvPr id="20" name="S08-mark297"/>
+          <p:cNvPr id="20" name="S08-mark285"/>
           <p:cNvSpPr/>
           <p:nvPr/>
         </p:nvSpPr>
@@ -16503,7 +15906,7 @@
       </p:sp>
       <p:sp>
         <p:nvSpPr>
-          <p:cNvPr id="21" name="S08-mark298"/>
+          <p:cNvPr id="21" name="S08-mark286"/>
           <p:cNvSpPr/>
           <p:nvPr/>
         </p:nvSpPr>
@@ -16528,7 +15931,7 @@
       </p:sp>
       <p:sp>
         <p:nvSpPr>
-          <p:cNvPr id="22" name="S08-mark299"/>
+          <p:cNvPr id="22" name="S08-mark287"/>
           <p:cNvSpPr/>
           <p:nvPr/>
         </p:nvSpPr>
@@ -16553,7 +15956,7 @@
       </p:sp>
       <p:sp>
         <p:nvSpPr>
-          <p:cNvPr id="23" name="S08-mark300"/>
+          <p:cNvPr id="23" name="S08-mark288"/>
           <p:cNvSpPr/>
           <p:nvPr/>
         </p:nvSpPr>
@@ -16578,7 +15981,7 @@
       </p:sp>
       <p:sp>
         <p:nvSpPr>
-          <p:cNvPr id="24" name="S08-label302"/>
+          <p:cNvPr id="24" name="S08-label290"/>
           <p:cNvSpPr txBox="1"/>
           <p:nvPr/>
         </p:nvSpPr>
@@ -16617,7 +16020,7 @@
       </p:sp>
       <p:sp>
         <p:nvSpPr>
-          <p:cNvPr id="25" name="S08-label304"/>
+          <p:cNvPr id="25" name="S08-label292"/>
           <p:cNvSpPr txBox="1"/>
           <p:nvPr/>
         </p:nvSpPr>
@@ -16656,7 +16059,7 @@
       </p:sp>
       <p:sp>
         <p:nvSpPr>
-          <p:cNvPr id="26" name="S08-label306"/>
+          <p:cNvPr id="26" name="S08-label294"/>
           <p:cNvSpPr txBox="1"/>
           <p:nvPr/>
         </p:nvSpPr>
@@ -16695,7 +16098,7 @@
       </p:sp>
       <p:sp>
         <p:nvSpPr>
-          <p:cNvPr id="27" name="S08-label308"/>
+          <p:cNvPr id="27" name="S08-label296"/>
           <p:cNvSpPr txBox="1"/>
           <p:nvPr/>
         </p:nvSpPr>
@@ -16734,7 +16137,7 @@
       </p:sp>
       <p:sp>
         <p:nvSpPr>
-          <p:cNvPr id="28" name="S08-label310"/>
+          <p:cNvPr id="28" name="S08-label298"/>
           <p:cNvSpPr txBox="1"/>
           <p:nvPr/>
         </p:nvSpPr>
@@ -16773,7 +16176,7 @@
       </p:sp>
       <p:sp>
         <p:nvSpPr>
-          <p:cNvPr id="29" name="S08-label312"/>
+          <p:cNvPr id="29" name="S08-label300"/>
           <p:cNvSpPr txBox="1"/>
           <p:nvPr/>
         </p:nvSpPr>
@@ -16812,7 +16215,7 @@
       </p:sp>
       <p:sp>
         <p:nvSpPr>
-          <p:cNvPr id="30" name="S08-label314"/>
+          <p:cNvPr id="30" name="S08-label302"/>
           <p:cNvSpPr txBox="1"/>
           <p:nvPr/>
         </p:nvSpPr>
@@ -16851,7 +16254,7 @@
       </p:sp>
       <p:sp>
         <p:nvSpPr>
-          <p:cNvPr id="31" name="S08-label316"/>
+          <p:cNvPr id="31" name="S08-label304"/>
           <p:cNvSpPr txBox="1"/>
           <p:nvPr/>
         </p:nvSpPr>
@@ -16890,7 +16293,7 @@
       </p:sp>
       <p:sp>
         <p:nvSpPr>
-          <p:cNvPr id="32" name="S08-label318"/>
+          <p:cNvPr id="32" name="S08-label306"/>
           <p:cNvSpPr txBox="1"/>
           <p:nvPr/>
         </p:nvSpPr>
@@ -16929,7 +16332,7 @@
       </p:sp>
       <p:sp>
         <p:nvSpPr>
-          <p:cNvPr id="33" name="S08-label320"/>
+          <p:cNvPr id="33" name="S08-label308"/>
           <p:cNvSpPr txBox="1"/>
           <p:nvPr/>
         </p:nvSpPr>
@@ -16968,7 +16371,7 @@
       </p:sp>
       <p:sp>
         <p:nvSpPr>
-          <p:cNvPr id="34" name="S08-label322"/>
+          <p:cNvPr id="34" name="S08-label310"/>
           <p:cNvSpPr txBox="1"/>
           <p:nvPr/>
         </p:nvSpPr>
@@ -17007,7 +16410,7 @@
       </p:sp>
       <p:sp>
         <p:nvSpPr>
-          <p:cNvPr id="35" name="S08-label324"/>
+          <p:cNvPr id="35" name="S08-label312"/>
           <p:cNvSpPr txBox="1"/>
           <p:nvPr/>
         </p:nvSpPr>
@@ -17046,7 +16449,7 @@
       </p:sp>
       <p:sp>
         <p:nvSpPr>
-          <p:cNvPr id="36" name="S08-label326"/>
+          <p:cNvPr id="36" name="S08-label314"/>
           <p:cNvSpPr txBox="1"/>
           <p:nvPr/>
         </p:nvSpPr>
@@ -17085,7 +16488,7 @@
       </p:sp>
       <p:sp>
         <p:nvSpPr>
-          <p:cNvPr id="37" name="S08-chip327"/>
+          <p:cNvPr id="37" name="S08-chip315"/>
           <p:cNvSpPr txBox="1"/>
           <p:nvPr/>
         </p:nvSpPr>
@@ -17132,7 +16535,7 @@
       </p:sp>
       <p:sp>
         <p:nvSpPr>
-          <p:cNvPr id="38" name="S08-text328"/>
+          <p:cNvPr id="38" name="S08-text316"/>
           <p:cNvSpPr txBox="1"/>
           <p:nvPr/>
         </p:nvSpPr>
@@ -17188,7 +16591,7 @@
       </p:sp>
       <p:sp>
         <p:nvSpPr>
-          <p:cNvPr id="39" name="S08-chip329"/>
+          <p:cNvPr id="39" name="S08-chip317"/>
           <p:cNvSpPr txBox="1"/>
           <p:nvPr/>
         </p:nvSpPr>
@@ -17235,7 +16638,7 @@
       </p:sp>
       <p:sp>
         <p:nvSpPr>
-          <p:cNvPr id="40" name="S08-text330"/>
+          <p:cNvPr id="40" name="S08-text318"/>
           <p:cNvSpPr txBox="1"/>
           <p:nvPr/>
         </p:nvSpPr>
@@ -17291,7 +16694,7 @@
       </p:sp>
       <p:sp>
         <p:nvSpPr>
-          <p:cNvPr id="41" name="S08-chip331"/>
+          <p:cNvPr id="41" name="S08-chip319"/>
           <p:cNvSpPr txBox="1"/>
           <p:nvPr/>
         </p:nvSpPr>
@@ -17338,7 +16741,7 @@
       </p:sp>
       <p:sp>
         <p:nvSpPr>
-          <p:cNvPr id="42" name="S08-text332"/>
+          <p:cNvPr id="42" name="S08-text320"/>
           <p:cNvSpPr txBox="1"/>
           <p:nvPr/>
         </p:nvSpPr>
@@ -17508,7 +16911,7 @@
       </p:sp>
       <p:sp>
         <p:nvSpPr>
-          <p:cNvPr id="3" name="S09-text333"/>
+          <p:cNvPr id="3" name="S09-text321"/>
           <p:cNvSpPr txBox="1"/>
           <p:nvPr/>
         </p:nvSpPr>
@@ -17547,7 +16950,7 @@
       </p:sp>
       <p:sp>
         <p:nvSpPr>
-          <p:cNvPr id="4" name="S09-chip334"/>
+          <p:cNvPr id="4" name="S09-chip322"/>
           <p:cNvSpPr txBox="1"/>
           <p:nvPr/>
         </p:nvSpPr>
@@ -17594,7 +16997,7 @@
       </p:sp>
       <p:sp>
         <p:nvSpPr>
-          <p:cNvPr id="5" name="S09-text335"/>
+          <p:cNvPr id="5" name="S09-text323"/>
           <p:cNvSpPr txBox="1"/>
           <p:nvPr/>
         </p:nvSpPr>
@@ -17650,7 +17053,7 @@
       </p:sp>
       <p:sp>
         <p:nvSpPr>
-          <p:cNvPr id="6" name="S09-chip336"/>
+          <p:cNvPr id="6" name="S09-chip324"/>
           <p:cNvSpPr txBox="1"/>
           <p:nvPr/>
         </p:nvSpPr>
@@ -17697,7 +17100,7 @@
       </p:sp>
       <p:sp>
         <p:nvSpPr>
-          <p:cNvPr id="7" name="S09-text337"/>
+          <p:cNvPr id="7" name="S09-text325"/>
           <p:cNvSpPr txBox="1"/>
           <p:nvPr/>
         </p:nvSpPr>
@@ -17753,7 +17156,7 @@
       </p:sp>
       <p:sp>
         <p:nvSpPr>
-          <p:cNvPr id="8" name="S09-chip338"/>
+          <p:cNvPr id="8" name="S09-chip326"/>
           <p:cNvSpPr txBox="1"/>
           <p:nvPr/>
         </p:nvSpPr>
@@ -17800,7 +17203,7 @@
       </p:sp>
       <p:sp>
         <p:nvSpPr>
-          <p:cNvPr id="9" name="S09-text339"/>
+          <p:cNvPr id="9" name="S09-text327"/>
           <p:cNvSpPr txBox="1"/>
           <p:nvPr/>
         </p:nvSpPr>
@@ -17856,7 +17259,7 @@
       </p:sp>
       <p:sp>
         <p:nvSpPr>
-          <p:cNvPr id="10" name="S09-chip340"/>
+          <p:cNvPr id="10" name="S09-chip328"/>
           <p:cNvSpPr txBox="1"/>
           <p:nvPr/>
         </p:nvSpPr>
@@ -17903,7 +17306,7 @@
       </p:sp>
       <p:sp>
         <p:nvSpPr>
-          <p:cNvPr id="11" name="S09-text341"/>
+          <p:cNvPr id="11" name="S09-text329"/>
           <p:cNvSpPr txBox="1"/>
           <p:nvPr/>
         </p:nvSpPr>
